--- a/edc_slides/01_cs165-intro.pptx
+++ b/edc_slides/01_cs165-intro.pptx
@@ -6,7 +6,7 @@
     <p:sldMasterId id="2147483688" r:id="rId2"/>
   </p:sldMasterIdLst>
   <p:notesMasterIdLst>
-    <p:notesMasterId r:id="rId35"/>
+    <p:notesMasterId r:id="rId40"/>
   </p:notesMasterIdLst>
   <p:sldIdLst>
     <p:sldId id="342" r:id="rId3"/>
@@ -32,20 +32,20 @@
     <p:sldId id="359" r:id="rId23"/>
     <p:sldId id="327" r:id="rId24"/>
     <p:sldId id="360" r:id="rId25"/>
-    <p:sldId id="370" r:id="rId40"/>
-    <p:sldId id="361" r:id="rId26"/>
-    <p:sldId id="362" r:id="rId27"/>
-    <p:sldId id="363" r:id="rId28"/>
-    <p:sldId id="364" r:id="rId29"/>
-    <p:sldId id="365" r:id="rId30"/>
-    <p:sldId id="366" r:id="rId31"/>
-    <p:sldId id="367" r:id="rId32"/>
-    <p:sldId id="371" r:id="rId41"/>
-    <p:sldId id="372" r:id="rId42"/>
-    <p:sldId id="373" r:id="rId43"/>
-    <p:sldId id="368" r:id="rId33"/>
-    <p:sldId id="374" r:id="rId44"/>
-    <p:sldId id="369" r:id="rId34"/>
+    <p:sldId id="370" r:id="rId26"/>
+    <p:sldId id="361" r:id="rId27"/>
+    <p:sldId id="362" r:id="rId28"/>
+    <p:sldId id="363" r:id="rId29"/>
+    <p:sldId id="364" r:id="rId30"/>
+    <p:sldId id="365" r:id="rId31"/>
+    <p:sldId id="366" r:id="rId32"/>
+    <p:sldId id="367" r:id="rId33"/>
+    <p:sldId id="371" r:id="rId34"/>
+    <p:sldId id="372" r:id="rId35"/>
+    <p:sldId id="373" r:id="rId36"/>
+    <p:sldId id="368" r:id="rId37"/>
+    <p:sldId id="374" r:id="rId38"/>
+    <p:sldId id="369" r:id="rId39"/>
   </p:sldIdLst>
   <p:sldSz cx="9144000" cy="5143500" type="screen16x9"/>
   <p:notesSz cx="5143500" cy="9144000"/>
@@ -1675,7 +1675,7 @@
           <a:lstStyle/>
           <a:p>
             <a:r>
-              <a:t>Sub-bullets fold in COMP0141 Week 1, slide 11 (correctness, safety, robustness).</a:t>
+              <a:t>From COMP0141 Week 1, slide 12. Schneier, "The Security Mindset", Schneier on Security, March 2008. Read it out; it lands better spoken than on screen.</a:t>
             </a:r>
           </a:p>
         </p:txBody>
@@ -1704,11 +1704,6 @@
         </p:txBody>
       </p:sp>
     </p:spTree>
-    <p:extLst>
-      <p:ext uri="{BB962C8B-B14F-4D97-AF65-F5344CB8AC3E}">
-        <p14:creationId xmlns:p14="http://schemas.microsoft.com/office/powerpoint/2010/main" val="1024086991"/>
-      </p:ext>
-    </p:extLst>
   </p:cSld>
   <p:clrMapOvr>
     <a:masterClrMapping/>
@@ -1760,7 +1755,9 @@
           <a:bodyPr/>
           <a:lstStyle/>
           <a:p>
-            <a:endParaRPr lang="en-US" dirty="0"/>
+            <a:r>
+              <a:t>Sub-bullets fold in COMP0141 Week 1, slide 11 (correctness, safety, robustness).</a:t>
+            </a:r>
           </a:p>
         </p:txBody>
       </p:sp>
@@ -1844,10 +1841,7 @@
           <a:bodyPr/>
           <a:lstStyle/>
           <a:p>
-            <a:r>
-              <a:rPr lang="en-US" dirty="0"/>
-              <a:t>Run this as a two-minute discussion. Answers usually start technical and get much better once someone says 'ask the cleaner'.</a:t>
-            </a:r>
+            <a:endParaRPr lang="en-US" dirty="0"/>
           </a:p>
         </p:txBody>
       </p:sp>
@@ -1931,7 +1925,10 @@
           <a:bodyPr/>
           <a:lstStyle/>
           <a:p>
-            <a:endParaRPr lang="en-US" dirty="0"/>
+            <a:r>
+              <a:rPr lang="en-US" dirty="0"/>
+              <a:t>Run this as a two-minute discussion. Answers usually start technical and get much better once someone says 'ask the cleaner'.</a:t>
+            </a:r>
           </a:p>
         </p:txBody>
       </p:sp>
@@ -2438,7 +2435,9 @@
           <a:bodyPr/>
           <a:lstStyle/>
           <a:p>
-            <a:endParaRPr lang="en-US" dirty="0"/>
+            <a:r>
+              <a:t>Condensed from COMP0141 Week 1, slides 30 to 35 (the Alice / attacker / bank build).</a:t>
+            </a:r>
           </a:p>
         </p:txBody>
       </p:sp>
@@ -2466,11 +2465,6 @@
         </p:txBody>
       </p:sp>
     </p:spTree>
-    <p:extLst>
-      <p:ext uri="{BB962C8B-B14F-4D97-AF65-F5344CB8AC3E}">
-        <p14:creationId xmlns:p14="http://schemas.microsoft.com/office/powerpoint/2010/main" val="1024086991"/>
-      </p:ext>
-    </p:extLst>
   </p:cSld>
   <p:clrMapOvr>
     <a:masterClrMapping/>
@@ -2479,7 +2473,7 @@
 </file>
 
 <file path=ppt/notesSlides/notesSlide33.xml><?xml version="1.0" encoding="utf-8"?>
-<p:notes xmlns:a="http://schemas.openxmlformats.org/drawingml/2006/main" xmlns:p="http://schemas.openxmlformats.org/presentationml/2006/main" xmlns:r="http://schemas.openxmlformats.org/officeDocument/2006/relationships">
+<p:notes xmlns:a="http://schemas.openxmlformats.org/drawingml/2006/main" xmlns:r="http://schemas.openxmlformats.org/officeDocument/2006/relationships" xmlns:p="http://schemas.openxmlformats.org/presentationml/2006/main">
   <p:cSld>
     <p:spTree>
       <p:nvGrpSpPr>
@@ -2523,7 +2517,7 @@
           <a:lstStyle/>
           <a:p>
             <a:r>
-              <a:t>From COMP0141 Week 1, slide 12. Schneier, "The Security Mindset", Schneier on Security, March 2008. Read it out; it lands better spoken than on screen.</a:t>
+              <a:t>From COMP0141 Week 1, slide 29.</a:t>
             </a:r>
           </a:p>
         </p:txBody>
@@ -2545,7 +2539,7 @@
           <a:p>
             <a:fld id="{F7021451-1387-4CA6-816F-3879F97B5CBC}" type="slidenum">
               <a:rPr lang="en-US"/>
-              <a:t>24</a:t>
+              <a:t>33</a:t>
             </a:fld>
             <a:endParaRPr lang="en-US"/>
           </a:p>
@@ -2560,7 +2554,7 @@
 </file>
 
 <file path=ppt/notesSlides/notesSlide34.xml><?xml version="1.0" encoding="utf-8"?>
-<p:notes xmlns:a="http://schemas.openxmlformats.org/drawingml/2006/main" xmlns:p="http://schemas.openxmlformats.org/presentationml/2006/main" xmlns:r="http://schemas.openxmlformats.org/officeDocument/2006/relationships">
+<p:notes xmlns:a="http://schemas.openxmlformats.org/drawingml/2006/main" xmlns:r="http://schemas.openxmlformats.org/officeDocument/2006/relationships" xmlns:p="http://schemas.openxmlformats.org/presentationml/2006/main">
   <p:cSld>
     <p:spTree>
       <p:nvGrpSpPr>
@@ -2604,7 +2598,7 @@
           <a:lstStyle/>
           <a:p>
             <a:r>
-              <a:t>Condensed from COMP0141 Week 1, slides 30 to 35 (the Alice / attacker / bank build).</a:t>
+              <a:t>Rebuilt in black and white from COMP0141 Week 1, slide 28. The original colored figure is still in UCL/slides/Week1.pptx if you prefer it. The arrow in the original ran from Author towards Trespasser: expert-written tools in less-skilled hands.</a:t>
             </a:r>
           </a:p>
         </p:txBody>
@@ -2626,7 +2620,7 @@
           <a:p>
             <a:fld id="{F7021451-1387-4CA6-816F-3879F97B5CBC}" type="slidenum">
               <a:rPr lang="en-US"/>
-              <a:t>24</a:t>
+              <a:t>34</a:t>
             </a:fld>
             <a:endParaRPr lang="en-US"/>
           </a:p>
@@ -2641,7 +2635,7 @@
 </file>
 
 <file path=ppt/notesSlides/notesSlide35.xml><?xml version="1.0" encoding="utf-8"?>
-<p:notes xmlns:a="http://schemas.openxmlformats.org/drawingml/2006/main" xmlns:p="http://schemas.openxmlformats.org/presentationml/2006/main" xmlns:r="http://schemas.openxmlformats.org/officeDocument/2006/relationships">
+<p:notes xmlns:a="http://schemas.openxmlformats.org/drawingml/2006/main" xmlns:r="http://schemas.openxmlformats.org/officeDocument/2006/relationships" xmlns:p="http://schemas.openxmlformats.org/presentationml/2006/main">
   <p:cSld>
     <p:spTree>
       <p:nvGrpSpPr>
@@ -2684,9 +2678,7 @@
           <a:bodyPr/>
           <a:lstStyle/>
           <a:p>
-            <a:r>
-              <a:t>From COMP0141 Week 1, slide 29.</a:t>
-            </a:r>
+            <a:endParaRPr lang="en-US" dirty="0"/>
           </a:p>
         </p:txBody>
       </p:sp>
@@ -2707,13 +2699,18 @@
           <a:p>
             <a:fld id="{F7021451-1387-4CA6-816F-3879F97B5CBC}" type="slidenum">
               <a:rPr lang="en-US"/>
-              <a:t>24</a:t>
+              <a:t>35</a:t>
             </a:fld>
             <a:endParaRPr lang="en-US"/>
           </a:p>
         </p:txBody>
       </p:sp>
     </p:spTree>
+    <p:extLst>
+      <p:ext uri="{BB962C8B-B14F-4D97-AF65-F5344CB8AC3E}">
+        <p14:creationId xmlns:p14="http://schemas.microsoft.com/office/powerpoint/2010/main" val="1024086991"/>
+      </p:ext>
+    </p:extLst>
   </p:cSld>
   <p:clrMapOvr>
     <a:masterClrMapping/>
@@ -2722,7 +2719,7 @@
 </file>
 
 <file path=ppt/notesSlides/notesSlide36.xml><?xml version="1.0" encoding="utf-8"?>
-<p:notes xmlns:a="http://schemas.openxmlformats.org/drawingml/2006/main" xmlns:p="http://schemas.openxmlformats.org/presentationml/2006/main" xmlns:r="http://schemas.openxmlformats.org/officeDocument/2006/relationships">
+<p:notes xmlns:a="http://schemas.openxmlformats.org/drawingml/2006/main" xmlns:r="http://schemas.openxmlformats.org/officeDocument/2006/relationships" xmlns:p="http://schemas.openxmlformats.org/presentationml/2006/main">
   <p:cSld>
     <p:spTree>
       <p:nvGrpSpPr>
@@ -2766,7 +2763,7 @@
           <a:lstStyle/>
           <a:p>
             <a:r>
-              <a:t>Rebuilt in black and white from COMP0141 Week 1, slide 28. The original colored figure is still in UCL/slides/Week1.pptx if you prefer it. The arrow in the original ran from Author towards Trespasser: expert-written tools in less-skilled hands.</a:t>
+              <a:t>From COMP0141 Week 1, slides 48 to 50.</a:t>
             </a:r>
           </a:p>
         </p:txBody>
@@ -2788,7 +2785,7 @@
           <a:p>
             <a:fld id="{F7021451-1387-4CA6-816F-3879F97B5CBC}" type="slidenum">
               <a:rPr lang="en-US"/>
-              <a:t>24</a:t>
+              <a:t>36</a:t>
             </a:fld>
             <a:endParaRPr lang="en-US"/>
           </a:p>
@@ -2803,7 +2800,7 @@
 </file>
 
 <file path=ppt/notesSlides/notesSlide37.xml><?xml version="1.0" encoding="utf-8"?>
-<p:notes xmlns:a="http://schemas.openxmlformats.org/drawingml/2006/main" xmlns:p="http://schemas.openxmlformats.org/presentationml/2006/main" xmlns:r="http://schemas.openxmlformats.org/officeDocument/2006/relationships">
+<p:notes xmlns:a="http://schemas.openxmlformats.org/drawingml/2006/main" xmlns:r="http://schemas.openxmlformats.org/officeDocument/2006/relationships" xmlns:p="http://schemas.openxmlformats.org/presentationml/2006/main">
   <p:cSld>
     <p:spTree>
       <p:nvGrpSpPr>
@@ -2846,9 +2843,7 @@
           <a:bodyPr/>
           <a:lstStyle/>
           <a:p>
-            <a:r>
-              <a:t>From COMP0141 Week 1, slides 48 to 50.</a:t>
-            </a:r>
+            <a:endParaRPr lang="en-US" dirty="0"/>
           </a:p>
         </p:txBody>
       </p:sp>
@@ -2869,13 +2864,18 @@
           <a:p>
             <a:fld id="{F7021451-1387-4CA6-816F-3879F97B5CBC}" type="slidenum">
               <a:rPr lang="en-US"/>
-              <a:t>24</a:t>
+              <a:t>37</a:t>
             </a:fld>
             <a:endParaRPr lang="en-US"/>
           </a:p>
         </p:txBody>
       </p:sp>
     </p:spTree>
+    <p:extLst>
+      <p:ext uri="{BB962C8B-B14F-4D97-AF65-F5344CB8AC3E}">
+        <p14:creationId xmlns:p14="http://schemas.microsoft.com/office/powerpoint/2010/main" val="1024086991"/>
+      </p:ext>
+    </p:extLst>
   </p:cSld>
   <p:clrMapOvr>
     <a:masterClrMapping/>
@@ -4895,8 +4895,13 @@
           <a:p>
             <a:r>
               <a:rPr lang="en-US" dirty="0"/>
-              <a:t>Eight Thursday afternoons attacking and defending a real C program</a:t>
-            </a:r>
+              <a:t>Eight Thursday afternoons attacking and defending a </a:t>
+            </a:r>
+            <a:r>
+              <a:rPr lang="en-US"/>
+              <a:t>real stuff</a:t>
+            </a:r>
+            <a:endParaRPr lang="en-US" dirty="0"/>
           </a:p>
           <a:p>
             <a:r>
@@ -4921,8 +4926,13 @@
           <a:p>
             <a:r>
               <a:rPr lang="en-US" dirty="0"/>
-              <a:t>It is demanding. It is also the part people remember.</a:t>
-            </a:r>
+              <a:t>It </a:t>
+            </a:r>
+            <a:r>
+              <a:rPr lang="en-US"/>
+              <a:t>is demanding. Lots of independent, constant work</a:t>
+            </a:r>
+            <a:endParaRPr lang="en-US" dirty="0"/>
           </a:p>
         </p:txBody>
       </p:sp>
@@ -6503,15 +6513,17 @@
           <a:lstStyle/>
           <a:p>
             <a:r>
-              <a:rPr lang="en-US" dirty="0"/>
-              <a:t>Welcome, and what this course is</a:t>
-            </a:r>
-          </a:p>
-          <a:p>
-            <a:r>
-              <a:rPr lang="en-US" dirty="0"/>
-              <a:t>Why software security, in three slides</a:t>
-            </a:r>
+              <a:rPr lang="en-US"/>
+              <a:t>Welcome and introduction</a:t>
+            </a:r>
+            <a:endParaRPr lang="en-US" dirty="0"/>
+          </a:p>
+          <a:p>
+            <a:r>
+              <a:rPr lang="en-US"/>
+              <a:t>Security TL;DR</a:t>
+            </a:r>
+            <a:endParaRPr lang="en-US" dirty="0"/>
           </a:p>
           <a:p>
             <a:r>
@@ -6522,8 +6534,16 @@
           <a:p>
             <a:r>
               <a:rPr lang="en-US" dirty="0"/>
-              <a:t>Logistics and grading</a:t>
-            </a:r>
+              <a:t>Logistics </a:t>
+            </a:r>
+            <a:r>
+              <a:rPr lang="en-US"/>
+              <a:t>and grading</a:t>
+            </a:r>
+            <a:br>
+              <a:rPr lang="en-US"/>
+            </a:br>
+            <a:endParaRPr lang="en-US" dirty="0"/>
           </a:p>
           <a:p>
             <a:r>
@@ -6602,9 +6622,10 @@
           <a:lstStyle/>
           <a:p>
             <a:r>
-              <a:rPr lang="en-US" dirty="0"/>
-              <a:t>The law is not theoretical here</a:t>
-            </a:r>
+              <a:rPr lang="en-US"/>
+              <a:t>Caveat Emptor</a:t>
+            </a:r>
+            <a:endParaRPr lang="en-US" dirty="0"/>
           </a:p>
         </p:txBody>
       </p:sp>
@@ -7056,6 +7077,168 @@
 
 <file path=ppt/slides/slide24.xml><?xml version="1.0" encoding="utf-8"?>
 <p:sld xmlns:a="http://schemas.openxmlformats.org/drawingml/2006/main" xmlns:r="http://schemas.openxmlformats.org/officeDocument/2006/relationships" xmlns:p="http://schemas.openxmlformats.org/presentationml/2006/main">
+  <p:cSld>
+    <p:spTree>
+      <p:nvGrpSpPr>
+        <p:cNvPr id="1" name=""/>
+        <p:cNvGrpSpPr/>
+        <p:nvPr/>
+      </p:nvGrpSpPr>
+      <p:grpSpPr>
+        <a:xfrm>
+          <a:off x="0" y="0"/>
+          <a:ext cx="0" cy="0"/>
+          <a:chOff x="0" y="0"/>
+          <a:chExt cx="0" cy="0"/>
+        </a:xfrm>
+      </p:grpSpPr>
+      <p:sp>
+        <p:nvSpPr>
+          <p:cNvPr id="2" name="Title 2"/>
+          <p:cNvSpPr>
+            <a:spLocks noGrp="1"/>
+          </p:cNvSpPr>
+          <p:nvPr>
+            <p:ph type="title"/>
+          </p:nvPr>
+        </p:nvSpPr>
+        <p:spPr/>
+        <p:txBody>
+          <a:bodyPr/>
+          <a:lstStyle/>
+          <a:p>
+            <a:r>
+              <a:rPr lang="en-US" dirty="0"/>
+              <a:t>How things can be made to fail</a:t>
+            </a:r>
+          </a:p>
+        </p:txBody>
+      </p:sp>
+      <p:sp>
+        <p:nvSpPr>
+          <p:cNvPr id="3" name="Content 3"/>
+          <p:cNvSpPr>
+            <a:spLocks noGrp="1"/>
+          </p:cNvSpPr>
+          <p:nvPr>
+            <p:ph idx="1"/>
+          </p:nvPr>
+        </p:nvSpPr>
+        <p:spPr/>
+        <p:txBody>
+          <a:bodyPr/>
+          <a:lstStyle/>
+          <a:p>
+            <a:pPr marL="0" indent="0">
+              <a:spcBef>
+                <a:spcPts val="0"/>
+              </a:spcBef>
+              <a:spcAft>
+                <a:spcPts val="500"/>
+              </a:spcAft>
+              <a:buNone/>
+            </a:pPr>
+            <a:r>
+              <a:rPr lang="en-US" sz="1700" dirty="0"/>
+              <a:t>Uncle Milton Industries has been selling ant farms to children since 1956. Some years ago, I remember opening one up with a friend. There were no actual ants included in the box. Instead, there was a card that you filled in with your address, and the company would mail you some ants. My friend expressed surprise that you could get ants sent to you in the mail.</a:t>
+            </a:r>
+          </a:p>
+          <a:p>
+            <a:pPr marL="0" indent="0">
+              <a:spcBef>
+                <a:spcPts val="0"/>
+              </a:spcBef>
+              <a:spcAft>
+                <a:spcPts val="500"/>
+              </a:spcAft>
+              <a:buNone/>
+            </a:pPr>
+            <a:r>
+              <a:rPr lang="en-US" sz="1700" dirty="0"/>
+              <a:t>I replied: “What’s really interesting is that these people will send a tube of live ants to anyone you tell them to.”</a:t>
+            </a:r>
+          </a:p>
+          <a:p>
+            <a:pPr marL="0" indent="0">
+              <a:spcBef>
+                <a:spcPts val="0"/>
+              </a:spcBef>
+              <a:spcAft>
+                <a:spcPts val="500"/>
+              </a:spcAft>
+              <a:buNone/>
+            </a:pPr>
+            <a:r>
+              <a:rPr lang="en-US" sz="1700" dirty="0"/>
+              <a:t>Good engineering involves thinking about how things can be made to work; </a:t>
+            </a:r>
+            <a:r>
+              <a:rPr lang="en-US" sz="1700" b="1" dirty="0"/>
+              <a:t>the security mindset involves thinking about how things can be made to fail.</a:t>
+            </a:r>
+            <a:r>
+              <a:rPr lang="en-US" sz="1700" dirty="0"/>
+              <a:t> It involves thinking like an attacker, an adversary or a criminal. You don’t have to exploit the vulnerabilities you find, but if you don’t see the world that way, you’ll never notice most security problems.</a:t>
+            </a:r>
+          </a:p>
+          <a:p>
+            <a:pPr marL="0" indent="0">
+              <a:spcBef>
+                <a:spcPts val="0"/>
+              </a:spcBef>
+              <a:spcAft>
+                <a:spcPts val="0"/>
+              </a:spcAft>
+              <a:buNone/>
+            </a:pPr>
+            <a:r>
+              <a:rPr lang="en-US" sz="1200" dirty="0">
+                <a:solidFill>
+                  <a:srgbClr val="7F7F7F"/>
+                </a:solidFill>
+              </a:rPr>
+              <a:t>Bruce Schneier, “The Security Mindset”, 2008</a:t>
+            </a:r>
+          </a:p>
+        </p:txBody>
+      </p:sp>
+      <p:sp>
+        <p:nvSpPr>
+          <p:cNvPr id="4" name="Slide Number 4"/>
+          <p:cNvSpPr>
+            <a:spLocks noGrp="1"/>
+          </p:cNvSpPr>
+          <p:nvPr>
+            <p:ph type="sldNum" sz="quarter" idx="4"/>
+          </p:nvPr>
+        </p:nvSpPr>
+        <p:spPr/>
+        <p:txBody>
+          <a:bodyPr/>
+          <a:lstStyle/>
+          <a:p>
+            <a:fld id="{B6F15528-21DE-4FAA-801E-634DDDAF4B2B}" type="slidenum">
+              <a:rPr lang="en-US"/>
+              <a:t>24</a:t>
+            </a:fld>
+            <a:endParaRPr lang="en-US" dirty="0">
+              <a:solidFill>
+                <a:srgbClr val="000000"/>
+              </a:solidFill>
+            </a:endParaRPr>
+          </a:p>
+        </p:txBody>
+      </p:sp>
+    </p:spTree>
+  </p:cSld>
+  <p:clrMapOvr>
+    <a:masterClrMapping/>
+  </p:clrMapOvr>
+</p:sld>
+</file>
+
+<file path=ppt/slides/slide25.xml><?xml version="1.0" encoding="utf-8"?>
+<p:sld xmlns:a="http://schemas.openxmlformats.org/drawingml/2006/main" xmlns:r="http://schemas.openxmlformats.org/officeDocument/2006/relationships" xmlns:p="http://schemas.openxmlformats.org/presentationml/2006/main">
   <p:cSld name="Slide 26">
     <p:spTree>
       <p:nvGrpSpPr>
@@ -7108,7 +7291,6 @@
           <a:bodyPr/>
           <a:lstStyle/>
           <a:p>
-            <a:pPr/>
             <a:r>
               <a:rPr lang="en-US" dirty="0"/>
               <a:t>Systems engineering optimizes the common case</a:t>
@@ -7123,7 +7305,6 @@
             <a:endParaRPr lang="en-US" sz="2000" dirty="0"/>
           </a:p>
           <a:p>
-            <a:pPr/>
             <a:r>
               <a:rPr lang="en-US" dirty="0"/>
               <a:t>Security lives in the corner cases</a:t>
@@ -7138,7 +7319,6 @@
             <a:endParaRPr lang="en-US" sz="2000" dirty="0"/>
           </a:p>
           <a:p>
-            <a:pPr/>
             <a:r>
               <a:rPr lang="en-US" b="1" dirty="0"/>
               <a:t>A program can work perfectly for every honest user and still be completely broken.</a:t>
@@ -7146,7 +7326,6 @@
             <a:endParaRPr lang="en-US" dirty="0"/>
           </a:p>
           <a:p>
-            <a:pPr/>
             <a:r>
               <a:rPr lang="en-US" dirty="0"/>
               <a:t>This is why testing for correctness does not give you security for free.</a:t>
@@ -7171,7 +7350,7 @@
           <a:p>
             <a:fld id="{B6F15528-21DE-4FAA-801E-634DDDAF4B2B}" type="slidenum">
               <a:rPr lang="en-US"/>
-              <a:t>24</a:t>
+              <a:t>25</a:t>
             </a:fld>
             <a:endParaRPr lang="en-US" dirty="0">
               <a:solidFill>
@@ -7194,7 +7373,7 @@
 </p:sld>
 </file>
 
-<file path=ppt/slides/slide25.xml><?xml version="1.0" encoding="utf-8"?>
+<file path=ppt/slides/slide26.xml><?xml version="1.0" encoding="utf-8"?>
 <p:sld xmlns:a="http://schemas.openxmlformats.org/drawingml/2006/main" xmlns:r="http://schemas.openxmlformats.org/officeDocument/2006/relationships" xmlns:p="http://schemas.openxmlformats.org/presentationml/2006/main">
   <p:cSld name="Slide 27">
     <p:spTree>
@@ -7309,7 +7488,7 @@
           <a:p>
             <a:fld id="{B6F15528-21DE-4FAA-801E-634DDDAF4B2B}" type="slidenum">
               <a:rPr lang="en-US"/>
-              <a:t>25</a:t>
+              <a:t>26</a:t>
             </a:fld>
             <a:endParaRPr lang="en-US" dirty="0">
               <a:solidFill>
@@ -7332,7 +7511,7 @@
 </p:sld>
 </file>
 
-<file path=ppt/slides/slide26.xml><?xml version="1.0" encoding="utf-8"?>
+<file path=ppt/slides/slide27.xml><?xml version="1.0" encoding="utf-8"?>
 <p:sld xmlns:a="http://schemas.openxmlformats.org/drawingml/2006/main" xmlns:r="http://schemas.openxmlformats.org/officeDocument/2006/relationships" xmlns:p="http://schemas.openxmlformats.org/presentationml/2006/main">
   <p:cSld name="Slide 28">
     <p:spTree>
@@ -7437,7 +7616,7 @@
           <a:p>
             <a:fld id="{B6F15528-21DE-4FAA-801E-634DDDAF4B2B}" type="slidenum">
               <a:rPr lang="en-US"/>
-              <a:t>26</a:t>
+              <a:t>27</a:t>
             </a:fld>
             <a:endParaRPr lang="en-US" dirty="0">
               <a:solidFill>
@@ -7460,7 +7639,7 @@
 </p:sld>
 </file>
 
-<file path=ppt/slides/slide27.xml><?xml version="1.0" encoding="utf-8"?>
+<file path=ppt/slides/slide28.xml><?xml version="1.0" encoding="utf-8"?>
 <p:sld xmlns:a="http://schemas.openxmlformats.org/drawingml/2006/main" xmlns:r="http://schemas.openxmlformats.org/officeDocument/2006/relationships" xmlns:p="http://schemas.openxmlformats.org/presentationml/2006/main">
   <p:cSld name="Slide 29">
     <p:spTree>
@@ -7573,7 +7752,7 @@
           <a:p>
             <a:fld id="{B6F15528-21DE-4FAA-801E-634DDDAF4B2B}" type="slidenum">
               <a:rPr lang="en-US"/>
-              <a:t>27</a:t>
+              <a:t>28</a:t>
             </a:fld>
             <a:endParaRPr lang="en-US" dirty="0">
               <a:solidFill>
@@ -7596,7 +7775,7 @@
 </p:sld>
 </file>
 
-<file path=ppt/slides/slide28.xml><?xml version="1.0" encoding="utf-8"?>
+<file path=ppt/slides/slide29.xml><?xml version="1.0" encoding="utf-8"?>
 <p:sld xmlns:a="http://schemas.openxmlformats.org/drawingml/2006/main" xmlns:r="http://schemas.openxmlformats.org/officeDocument/2006/relationships" xmlns:p="http://schemas.openxmlformats.org/presentationml/2006/main">
   <p:cSld name="Slide 30">
     <p:spTree>
@@ -7716,148 +7895,6 @@
           <a:p>
             <a:fld id="{B6F15528-21DE-4FAA-801E-634DDDAF4B2B}" type="slidenum">
               <a:rPr lang="en-US"/>
-              <a:t>28</a:t>
-            </a:fld>
-            <a:endParaRPr lang="en-US" dirty="0">
-              <a:solidFill>
-                <a:srgbClr val="000000"/>
-              </a:solidFill>
-            </a:endParaRPr>
-          </a:p>
-        </p:txBody>
-      </p:sp>
-    </p:spTree>
-    <p:extLst>
-      <p:ext uri="{BB962C8B-B14F-4D97-AF65-F5344CB8AC3E}">
-        <p14:creationId xmlns:p14="http://schemas.microsoft.com/office/powerpoint/2010/main" val="4047741261"/>
-      </p:ext>
-    </p:extLst>
-  </p:cSld>
-  <p:clrMapOvr>
-    <a:masterClrMapping/>
-  </p:clrMapOvr>
-</p:sld>
-</file>
-
-<file path=ppt/slides/slide29.xml><?xml version="1.0" encoding="utf-8"?>
-<p:sld xmlns:a="http://schemas.openxmlformats.org/drawingml/2006/main" xmlns:r="http://schemas.openxmlformats.org/officeDocument/2006/relationships" xmlns:p="http://schemas.openxmlformats.org/presentationml/2006/main">
-  <p:cSld name="Slide 31">
-    <p:spTree>
-      <p:nvGrpSpPr>
-        <p:cNvPr id="1" name=""/>
-        <p:cNvGrpSpPr/>
-        <p:nvPr/>
-      </p:nvGrpSpPr>
-      <p:grpSpPr>
-        <a:xfrm>
-          <a:off x="0" y="0"/>
-          <a:ext cx="0" cy="0"/>
-          <a:chOff x="0" y="0"/>
-          <a:chExt cx="0" cy="0"/>
-        </a:xfrm>
-      </p:grpSpPr>
-      <p:sp>
-        <p:nvSpPr>
-          <p:cNvPr id="2" name="Title 2"/>
-          <p:cNvSpPr>
-            <a:spLocks noGrp="1"/>
-          </p:cNvSpPr>
-          <p:nvPr>
-            <p:ph type="title"/>
-          </p:nvPr>
-        </p:nvSpPr>
-        <p:spPr/>
-        <p:txBody>
-          <a:bodyPr/>
-          <a:lstStyle/>
-          <a:p>
-            <a:r>
-              <a:rPr lang="en-US" dirty="0"/>
-              <a:t>What defenders actually do</a:t>
-            </a:r>
-          </a:p>
-        </p:txBody>
-      </p:sp>
-      <p:sp>
-        <p:nvSpPr>
-          <p:cNvPr id="3" name="Content 3"/>
-          <p:cNvSpPr>
-            <a:spLocks noGrp="1"/>
-          </p:cNvSpPr>
-          <p:nvPr>
-            <p:ph idx="1"/>
-          </p:nvPr>
-        </p:nvSpPr>
-        <p:spPr/>
-        <p:txBody>
-          <a:bodyPr/>
-          <a:lstStyle/>
-          <a:p>
-            <a:r>
-              <a:rPr lang="en-US" dirty="0"/>
-              <a:t>Avoidance: find and fix the bugs before shipping</a:t>
-            </a:r>
-          </a:p>
-          <a:p>
-            <a:pPr lvl="1"/>
-            <a:r>
-              <a:rPr lang="en-US" dirty="0"/>
-              <a:t>Labs 2, 5 and 7.</a:t>
-            </a:r>
-            <a:endParaRPr lang="en-US" sz="2000" dirty="0"/>
-          </a:p>
-          <a:p>
-            <a:r>
-              <a:rPr lang="en-US" dirty="0"/>
-              <a:t>Prevention: make the bad outcome structurally impossible</a:t>
-            </a:r>
-          </a:p>
-          <a:p>
-            <a:pPr lvl="1"/>
-            <a:r>
-              <a:rPr lang="en-US" dirty="0"/>
-              <a:t>Lab 6, and most of the second half of the course.</a:t>
-            </a:r>
-            <a:endParaRPr lang="en-US" sz="2000" dirty="0"/>
-          </a:p>
-          <a:p>
-            <a:r>
-              <a:rPr lang="en-US" dirty="0"/>
-              <a:t>Deterrence: raise the cost of attacking enough that it is not worth it</a:t>
-            </a:r>
-          </a:p>
-          <a:p>
-            <a:r>
-              <a:rPr lang="en-US" dirty="0"/>
-              <a:t>Detection: assume some attacks succeed, and notice when they do</a:t>
-            </a:r>
-          </a:p>
-          <a:p>
-            <a:r>
-              <a:rPr lang="en-US" b="1" dirty="0"/>
-              <a:t>No single one of these is sufficient. You need all four.</a:t>
-            </a:r>
-            <a:endParaRPr lang="en-US" dirty="0"/>
-          </a:p>
-        </p:txBody>
-      </p:sp>
-      <p:sp>
-        <p:nvSpPr>
-          <p:cNvPr id="4" name="Slide Number 4"/>
-          <p:cNvSpPr>
-            <a:spLocks noGrp="1"/>
-          </p:cNvSpPr>
-          <p:nvPr>
-            <p:ph type="sldNum" sz="quarter" idx="4"/>
-          </p:nvPr>
-        </p:nvSpPr>
-        <p:spPr/>
-        <p:txBody>
-          <a:bodyPr/>
-          <a:lstStyle/>
-          <a:p>
-            <a:fld id="{B6F15528-21DE-4FAA-801E-634DDDAF4B2B}" type="slidenum">
-              <a:rPr lang="en-US"/>
               <a:t>29</a:t>
             </a:fld>
             <a:endParaRPr lang="en-US" dirty="0">
@@ -7871,7 +7908,7 @@
     </p:spTree>
     <p:extLst>
       <p:ext uri="{BB962C8B-B14F-4D97-AF65-F5344CB8AC3E}">
-        <p14:creationId xmlns:p14="http://schemas.microsoft.com/office/powerpoint/2010/main" val="1529139303"/>
+        <p14:creationId xmlns:p14="http://schemas.microsoft.com/office/powerpoint/2010/main" val="4047741261"/>
       </p:ext>
     </p:extLst>
   </p:cSld>
@@ -8046,6 +8083,148 @@
 
 <file path=ppt/slides/slide30.xml><?xml version="1.0" encoding="utf-8"?>
 <p:sld xmlns:a="http://schemas.openxmlformats.org/drawingml/2006/main" xmlns:r="http://schemas.openxmlformats.org/officeDocument/2006/relationships" xmlns:p="http://schemas.openxmlformats.org/presentationml/2006/main">
+  <p:cSld name="Slide 31">
+    <p:spTree>
+      <p:nvGrpSpPr>
+        <p:cNvPr id="1" name=""/>
+        <p:cNvGrpSpPr/>
+        <p:nvPr/>
+      </p:nvGrpSpPr>
+      <p:grpSpPr>
+        <a:xfrm>
+          <a:off x="0" y="0"/>
+          <a:ext cx="0" cy="0"/>
+          <a:chOff x="0" y="0"/>
+          <a:chExt cx="0" cy="0"/>
+        </a:xfrm>
+      </p:grpSpPr>
+      <p:sp>
+        <p:nvSpPr>
+          <p:cNvPr id="2" name="Title 2"/>
+          <p:cNvSpPr>
+            <a:spLocks noGrp="1"/>
+          </p:cNvSpPr>
+          <p:nvPr>
+            <p:ph type="title"/>
+          </p:nvPr>
+        </p:nvSpPr>
+        <p:spPr/>
+        <p:txBody>
+          <a:bodyPr/>
+          <a:lstStyle/>
+          <a:p>
+            <a:r>
+              <a:rPr lang="en-US" dirty="0"/>
+              <a:t>What defenders actually do</a:t>
+            </a:r>
+          </a:p>
+        </p:txBody>
+      </p:sp>
+      <p:sp>
+        <p:nvSpPr>
+          <p:cNvPr id="3" name="Content 3"/>
+          <p:cNvSpPr>
+            <a:spLocks noGrp="1"/>
+          </p:cNvSpPr>
+          <p:nvPr>
+            <p:ph idx="1"/>
+          </p:nvPr>
+        </p:nvSpPr>
+        <p:spPr/>
+        <p:txBody>
+          <a:bodyPr/>
+          <a:lstStyle/>
+          <a:p>
+            <a:r>
+              <a:rPr lang="en-US" dirty="0"/>
+              <a:t>Avoidance: find and fix the bugs before shipping</a:t>
+            </a:r>
+          </a:p>
+          <a:p>
+            <a:pPr lvl="1"/>
+            <a:r>
+              <a:rPr lang="en-US" dirty="0"/>
+              <a:t>Labs 2, 5 and 7.</a:t>
+            </a:r>
+            <a:endParaRPr lang="en-US" sz="2000" dirty="0"/>
+          </a:p>
+          <a:p>
+            <a:r>
+              <a:rPr lang="en-US" dirty="0"/>
+              <a:t>Prevention: make the bad outcome structurally impossible</a:t>
+            </a:r>
+          </a:p>
+          <a:p>
+            <a:pPr lvl="1"/>
+            <a:r>
+              <a:rPr lang="en-US" dirty="0"/>
+              <a:t>Lab 6, and most of the second half of the course.</a:t>
+            </a:r>
+            <a:endParaRPr lang="en-US" sz="2000" dirty="0"/>
+          </a:p>
+          <a:p>
+            <a:r>
+              <a:rPr lang="en-US" dirty="0"/>
+              <a:t>Deterrence: raise the cost of attacking enough that it is not worth it</a:t>
+            </a:r>
+          </a:p>
+          <a:p>
+            <a:r>
+              <a:rPr lang="en-US" dirty="0"/>
+              <a:t>Detection: assume some attacks succeed, and notice when they do</a:t>
+            </a:r>
+          </a:p>
+          <a:p>
+            <a:r>
+              <a:rPr lang="en-US" b="1" dirty="0"/>
+              <a:t>No single one of these is sufficient. You need all four.</a:t>
+            </a:r>
+            <a:endParaRPr lang="en-US" dirty="0"/>
+          </a:p>
+        </p:txBody>
+      </p:sp>
+      <p:sp>
+        <p:nvSpPr>
+          <p:cNvPr id="4" name="Slide Number 4"/>
+          <p:cNvSpPr>
+            <a:spLocks noGrp="1"/>
+          </p:cNvSpPr>
+          <p:nvPr>
+            <p:ph type="sldNum" sz="quarter" idx="4"/>
+          </p:nvPr>
+        </p:nvSpPr>
+        <p:spPr/>
+        <p:txBody>
+          <a:bodyPr/>
+          <a:lstStyle/>
+          <a:p>
+            <a:fld id="{B6F15528-21DE-4FAA-801E-634DDDAF4B2B}" type="slidenum">
+              <a:rPr lang="en-US"/>
+              <a:t>30</a:t>
+            </a:fld>
+            <a:endParaRPr lang="en-US" dirty="0">
+              <a:solidFill>
+                <a:srgbClr val="000000"/>
+              </a:solidFill>
+            </a:endParaRPr>
+          </a:p>
+        </p:txBody>
+      </p:sp>
+    </p:spTree>
+    <p:extLst>
+      <p:ext uri="{BB962C8B-B14F-4D97-AF65-F5344CB8AC3E}">
+        <p14:creationId xmlns:p14="http://schemas.microsoft.com/office/powerpoint/2010/main" val="1529139303"/>
+      </p:ext>
+    </p:extLst>
+  </p:cSld>
+  <p:clrMapOvr>
+    <a:masterClrMapping/>
+  </p:clrMapOvr>
+</p:sld>
+</file>
+
+<file path=ppt/slides/slide31.xml><?xml version="1.0" encoding="utf-8"?>
+<p:sld xmlns:a="http://schemas.openxmlformats.org/drawingml/2006/main" xmlns:r="http://schemas.openxmlformats.org/officeDocument/2006/relationships" xmlns:p="http://schemas.openxmlformats.org/presentationml/2006/main">
   <p:cSld name="Slide 32">
     <p:spTree>
       <p:nvGrpSpPr>
@@ -8169,7 +8348,7 @@
           <a:p>
             <a:fld id="{B6F15528-21DE-4FAA-801E-634DDDAF4B2B}" type="slidenum">
               <a:rPr lang="en-US"/>
-              <a:t>30</a:t>
+              <a:t>31</a:t>
             </a:fld>
             <a:endParaRPr lang="en-US" dirty="0">
               <a:solidFill>
@@ -8192,9 +8371,9 @@
 </p:sld>
 </file>
 
-<file path=ppt/slides/slide31.xml><?xml version="1.0" encoding="utf-8"?>
+<file path=ppt/slides/slide32.xml><?xml version="1.0" encoding="utf-8"?>
 <p:sld xmlns:a="http://schemas.openxmlformats.org/drawingml/2006/main" xmlns:r="http://schemas.openxmlformats.org/officeDocument/2006/relationships" xmlns:p="http://schemas.openxmlformats.org/presentationml/2006/main">
-  <p:cSld name="Slide 33">
+  <p:cSld>
     <p:spTree>
       <p:nvGrpSpPr>
         <p:cNvPr id="1" name=""/>
@@ -8226,178 +8405,8 @@
           <a:p>
             <a:r>
               <a:rPr lang="en-US" dirty="0"/>
-              <a:t>Threat models</a:t>
-            </a:r>
-          </a:p>
-        </p:txBody>
-      </p:sp>
-      <p:sp>
-        <p:nvSpPr>
-          <p:cNvPr id="3" name="Content 3"/>
-          <p:cNvSpPr>
-            <a:spLocks noGrp="1"/>
-          </p:cNvSpPr>
-          <p:nvPr>
-            <p:ph idx="1"/>
-          </p:nvPr>
-        </p:nvSpPr>
-        <p:spPr/>
-        <p:txBody>
-          <a:bodyPr/>
-          <a:lstStyle/>
-          <a:p>
-            <a:r>
-              <a:rPr lang="en-US" dirty="0"/>
-              <a:t>Before you can defend anything, write down</a:t>
-            </a:r>
-          </a:p>
-          <a:p>
-            <a:pPr lvl="1"/>
-            <a:r>
-              <a:rPr lang="en-US" dirty="0"/>
-              <a:t>Who the attacker is, what they can do, and what they want</a:t>
-            </a:r>
-            <a:endParaRPr lang="en-US" sz="2000" dirty="0"/>
-          </a:p>
-          <a:p>
-            <a:pPr lvl="1"/>
-            <a:r>
-              <a:rPr lang="en-US" dirty="0"/>
-              <a:t>What defenses are already in place</a:t>
-            </a:r>
-            <a:endParaRPr lang="en-US" sz="2000" dirty="0"/>
-          </a:p>
-          <a:p>
-            <a:r>
-              <a:rPr lang="en-US" dirty="0"/>
-              <a:t>A useful ladder of terms</a:t>
-            </a:r>
-          </a:p>
-          <a:p>
-            <a:pPr lvl="1"/>
-            <a:r>
-              <a:rPr lang="en-US" sz="2000" b="1" dirty="0"/>
-              <a:t>Weakness  &lt;  Vulnerability  &lt;  Exploit  &lt;  Attack</a:t>
-            </a:r>
-            <a:endParaRPr lang="en-US" sz="2000" dirty="0"/>
-          </a:p>
-          <a:p>
-            <a:r>
-              <a:rPr lang="en-US" b="1" dirty="0"/>
-              <a:t>Without a threat model, "is it secure?" has no answer at all.</a:t>
-            </a:r>
-            <a:endParaRPr lang="en-US" dirty="0"/>
-          </a:p>
-        </p:txBody>
-      </p:sp>
-      <p:sp>
-        <p:nvSpPr>
-          <p:cNvPr id="4" name="Slide Number 4"/>
-          <p:cNvSpPr>
-            <a:spLocks noGrp="1"/>
-          </p:cNvSpPr>
-          <p:nvPr>
-            <p:ph type="sldNum" sz="quarter" idx="4"/>
-          </p:nvPr>
-        </p:nvSpPr>
-        <p:spPr/>
-        <p:txBody>
-          <a:bodyPr/>
-          <a:lstStyle/>
-          <a:p>
-            <a:fld id="{B6F15528-21DE-4FAA-801E-634DDDAF4B2B}" type="slidenum">
-              <a:rPr lang="en-US"/>
-              <a:t>31</a:t>
-            </a:fld>
-            <a:endParaRPr lang="en-US" dirty="0">
-              <a:solidFill>
-                <a:srgbClr val="000000"/>
-              </a:solidFill>
-            </a:endParaRPr>
-          </a:p>
-        </p:txBody>
-      </p:sp>
-    </p:spTree>
-    <p:extLst>
-      <p:ext uri="{BB962C8B-B14F-4D97-AF65-F5344CB8AC3E}">
-        <p14:creationId xmlns:p14="http://schemas.microsoft.com/office/powerpoint/2010/main" val="2608079393"/>
-      </p:ext>
-    </p:extLst>
-  </p:cSld>
-  <p:clrMapOvr>
-    <a:masterClrMapping/>
-  </p:clrMapOvr>
-</p:sld>
-</file>
-
-<file path=ppt/slides/slide32.xml><?xml version="1.0" encoding="utf-8"?>
-<p:sld xmlns:a="http://schemas.openxmlformats.org/drawingml/2006/main" xmlns:r="http://schemas.openxmlformats.org/officeDocument/2006/relationships" xmlns:p="http://schemas.openxmlformats.org/presentationml/2006/main">
-  <p:cSld name="Slide 34">
-    <p:spTree>
-      <p:nvGrpSpPr>
-        <p:cNvPr id="1" name=""/>
-        <p:cNvGrpSpPr/>
-        <p:nvPr/>
-      </p:nvGrpSpPr>
-      <p:grpSpPr>
-        <a:xfrm>
-          <a:off x="0" y="0"/>
-          <a:ext cx="0" cy="0"/>
-          <a:chOff x="0" y="0"/>
-          <a:chExt cx="0" cy="0"/>
-        </a:xfrm>
-      </p:grpSpPr>
-      <p:sp>
-        <p:nvSpPr>
-          <p:cNvPr id="2" name="Title 2"/>
-          <p:cNvSpPr>
-            <a:spLocks noGrp="1"/>
-          </p:cNvSpPr>
-          <p:nvPr>
-            <p:ph type="title"/>
-          </p:nvPr>
-        </p:nvSpPr>
-        <p:spPr/>
-        <p:txBody>
-          <a:bodyPr/>
-          <a:lstStyle/>
-          <a:p>
-            <a:r>
-              <a:rPr lang="en-US" dirty="0"/>
-              <a:t>Before Wednesday</a:t>
-            </a:r>
-          </a:p>
-        </p:txBody>
-      </p:sp>
-      <p:sp>
-        <p:nvSpPr>
-          <p:cNvPr id="3" name="Content 3"/>
-          <p:cNvSpPr>
-            <a:spLocks noGrp="1"/>
-          </p:cNvSpPr>
-          <p:nvPr>
-            <p:ph idx="1"/>
-          </p:nvPr>
-        </p:nvSpPr>
-        <p:spPr/>
-        <p:txBody>
-          <a:bodyPr/>
-          <a:lstStyle/>
-          <a:p>
-            <a:r>
-              <a:rPr lang="en-US" dirty="0"/>
-              <a:t>Read the syllabus, check the schedule, etc.</a:t>
-            </a:r>
-          </a:p>
-          <a:p>
-            <a:endParaRPr lang="en-US" sz="2000" dirty="0"/>
-          </a:p>
-          <a:p>
-            <a:r>
-              <a:rPr lang="en-US" sz="2600" b="1" dirty="0"/>
-              <a:t>Questions?</a:t>
-            </a:r>
-            <a:endParaRPr lang="en-US" dirty="0"/>
+              <a:t>STRIDE: six ways to break those properties</a:t>
+            </a:r>
           </a:p>
         </p:txBody>
       </p:sp>
@@ -8419,233 +8428,6 @@
             <a:fld id="{B6F15528-21DE-4FAA-801E-634DDDAF4B2B}" type="slidenum">
               <a:rPr lang="en-US"/>
               <a:t>32</a:t>
-            </a:fld>
-            <a:endParaRPr lang="en-US" dirty="0">
-              <a:solidFill>
-                <a:srgbClr val="000000"/>
-              </a:solidFill>
-            </a:endParaRPr>
-          </a:p>
-        </p:txBody>
-      </p:sp>
-    </p:spTree>
-    <p:extLst>
-      <p:ext uri="{BB962C8B-B14F-4D97-AF65-F5344CB8AC3E}">
-        <p14:creationId xmlns:p14="http://schemas.microsoft.com/office/powerpoint/2010/main" val="1386048013"/>
-      </p:ext>
-    </p:extLst>
-  </p:cSld>
-  <p:clrMapOvr>
-    <a:masterClrMapping/>
-  </p:clrMapOvr>
-</p:sld>
-</file>
-
-<file path=ppt/slides/slide33.xml><?xml version="1.0" encoding="utf-8"?>
-<p:sld xmlns:a="http://schemas.openxmlformats.org/drawingml/2006/main" xmlns:p="http://schemas.openxmlformats.org/presentationml/2006/main" xmlns:r="http://schemas.openxmlformats.org/officeDocument/2006/relationships">
-  <p:cSld>
-    <p:spTree>
-      <p:nvGrpSpPr>
-        <p:cNvPr id="1" name=""/>
-        <p:cNvGrpSpPr/>
-        <p:nvPr/>
-      </p:nvGrpSpPr>
-      <p:grpSpPr/>
-      <p:sp>
-        <p:nvSpPr>
-          <p:cNvPr id="2" name="Title 2"/>
-          <p:cNvSpPr>
-            <a:spLocks noGrp="1"/>
-          </p:cNvSpPr>
-          <p:nvPr>
-            <p:ph type="title"/>
-          </p:nvPr>
-        </p:nvSpPr>
-        <p:spPr/>
-        <p:txBody>
-          <a:bodyPr/>
-          <a:lstStyle/>
-          <a:p>
-            <a:r>
-              <a:rPr lang="en-US" dirty="0"/>
-              <a:t>How things can be made to fail</a:t>
-            </a:r>
-          </a:p>
-        </p:txBody>
-      </p:sp>
-      <p:sp>
-        <p:nvSpPr>
-          <p:cNvPr id="3" name="Content 3"/>
-          <p:cNvSpPr>
-            <a:spLocks noGrp="1"/>
-          </p:cNvSpPr>
-          <p:nvPr>
-            <p:ph idx="1"/>
-          </p:nvPr>
-        </p:nvSpPr>
-        <p:spPr/>
-        <p:txBody>
-          <a:bodyPr/>
-          <a:lstStyle/>
-          <a:p>
-            <a:pPr marL="0" indent="0">
-              <a:spcBef>
-                <a:spcPts val="0"/>
-              </a:spcBef>
-              <a:spcAft>
-                <a:spcPts val="500"/>
-              </a:spcAft>
-              <a:buNone/>
-            </a:pPr>
-            <a:r>
-              <a:rPr lang="en-US" dirty="0" sz="1700"/>
-              <a:t>Uncle Milton Industries has been selling ant farms to children since 1956. Some years ago, I remember opening one up with a friend. There were no actual ants included in the box. Instead, there was a card that you filled in with your address, and the company would mail you some ants. My friend expressed surprise that you could get ants sent to you in the mail.</a:t>
-            </a:r>
-          </a:p>
-          <a:p>
-            <a:pPr marL="0" indent="0">
-              <a:spcBef>
-                <a:spcPts val="0"/>
-              </a:spcBef>
-              <a:spcAft>
-                <a:spcPts val="500"/>
-              </a:spcAft>
-              <a:buNone/>
-            </a:pPr>
-            <a:r>
-              <a:rPr lang="en-US" dirty="0" sz="1700"/>
-              <a:t>I replied: “What’s really interesting is that these people will send a tube of live ants to anyone you tell them to.”</a:t>
-            </a:r>
-          </a:p>
-          <a:p>
-            <a:pPr marL="0" indent="0">
-              <a:spcBef>
-                <a:spcPts val="0"/>
-              </a:spcBef>
-              <a:spcAft>
-                <a:spcPts val="500"/>
-              </a:spcAft>
-              <a:buNone/>
-            </a:pPr>
-            <a:r>
-              <a:rPr lang="en-US" dirty="0" sz="1700"/>
-              <a:t>Good engineering involves thinking about how things can be made to work; </a:t>
-            </a:r>
-            <a:r>
-              <a:rPr lang="en-US" dirty="0" b="1" sz="1700"/>
-              <a:t>the security mindset involves thinking about how things can be made to fail.</a:t>
-            </a:r>
-            <a:r>
-              <a:rPr lang="en-US" dirty="0" sz="1700"/>
-              <a:t> It involves thinking like an attacker, an adversary or a criminal. You don’t have to exploit the vulnerabilities you find, but if you don’t see the world that way, you’ll never notice most security problems.</a:t>
-            </a:r>
-          </a:p>
-          <a:p>
-            <a:pPr marL="0" indent="0">
-              <a:spcBef>
-                <a:spcPts val="0"/>
-              </a:spcBef>
-              <a:spcAft>
-                <a:spcPts val="0"/>
-              </a:spcAft>
-              <a:buNone/>
-            </a:pPr>
-            <a:r>
-              <a:rPr lang="en-US" dirty="0" sz="1200">
-                <a:solidFill>
-                  <a:srgbClr val="7F7F7F"/>
-                </a:solidFill>
-              </a:rPr>
-              <a:t>Bruce Schneier, “The Security Mindset”, 2008</a:t>
-            </a:r>
-          </a:p>
-        </p:txBody>
-      </p:sp>
-      <p:sp>
-        <p:nvSpPr>
-          <p:cNvPr id="4" name="Slide Number 4"/>
-          <p:cNvSpPr>
-            <a:spLocks noGrp="1"/>
-          </p:cNvSpPr>
-          <p:nvPr>
-            <p:ph type="sldNum" sz="quarter" idx="4"/>
-          </p:nvPr>
-        </p:nvSpPr>
-        <p:spPr/>
-        <p:txBody>
-          <a:bodyPr/>
-          <a:lstStyle/>
-          <a:p>
-            <a:fld id="{B6F15528-21DE-4FAA-801E-634DDDAF4B2B}" type="slidenum">
-              <a:rPr lang="en-US"/>
-              <a:t>24</a:t>
-            </a:fld>
-            <a:endParaRPr lang="en-US" dirty="0">
-              <a:solidFill>
-                <a:srgbClr val="000000"/>
-              </a:solidFill>
-            </a:endParaRPr>
-          </a:p>
-        </p:txBody>
-      </p:sp>
-    </p:spTree>
-  </p:cSld>
-  <p:clrMapOvr>
-    <a:masterClrMapping/>
-  </p:clrMapOvr>
-</p:sld>
-</file>
-
-<file path=ppt/slides/slide34.xml><?xml version="1.0" encoding="utf-8"?>
-<p:sld xmlns:a="http://schemas.openxmlformats.org/drawingml/2006/main" xmlns:p="http://schemas.openxmlformats.org/presentationml/2006/main" xmlns:r="http://schemas.openxmlformats.org/officeDocument/2006/relationships">
-  <p:cSld>
-    <p:spTree>
-      <p:nvGrpSpPr>
-        <p:cNvPr id="1" name=""/>
-        <p:cNvGrpSpPr/>
-        <p:nvPr/>
-      </p:nvGrpSpPr>
-      <p:grpSpPr/>
-      <p:sp>
-        <p:nvSpPr>
-          <p:cNvPr id="2" name="Title 2"/>
-          <p:cNvSpPr>
-            <a:spLocks noGrp="1"/>
-          </p:cNvSpPr>
-          <p:nvPr>
-            <p:ph type="title"/>
-          </p:nvPr>
-        </p:nvSpPr>
-        <p:spPr/>
-        <p:txBody>
-          <a:bodyPr/>
-          <a:lstStyle/>
-          <a:p>
-            <a:r>
-              <a:rPr lang="en-US" dirty="0"/>
-              <a:t>STRIDE: six ways to break those properties</a:t>
-            </a:r>
-          </a:p>
-        </p:txBody>
-      </p:sp>
-      <p:sp>
-        <p:nvSpPr>
-          <p:cNvPr id="4" name="Slide Number 4"/>
-          <p:cNvSpPr>
-            <a:spLocks noGrp="1"/>
-          </p:cNvSpPr>
-          <p:nvPr>
-            <p:ph type="sldNum" sz="quarter" idx="4"/>
-          </p:nvPr>
-        </p:nvSpPr>
-        <p:spPr/>
-        <p:txBody>
-          <a:bodyPr/>
-          <a:lstStyle/>
-          <a:p>
-            <a:fld id="{B6F15528-21DE-4FAA-801E-634DDDAF4B2B}" type="slidenum">
-              <a:rPr lang="en-US"/>
-              <a:t>24</a:t>
             </a:fld>
             <a:endParaRPr lang="en-US" dirty="0">
               <a:solidFill>
@@ -8674,9 +8456,27 @@
                 <a:tableStyleId>{5940675A-B579-460E-94D1-54222C63F5DA}</a:tableStyleId>
               </a:tblPr>
               <a:tblGrid>
-                <a:gridCol w="2651760"/>
-                <a:gridCol w="1737360"/>
-                <a:gridCol w="3657600"/>
+                <a:gridCol w="2651760">
+                  <a:extLst>
+                    <a:ext uri="{9D8B030D-6E8A-4147-A177-3AD203B41FA5}">
+                      <a16:colId xmlns:a16="http://schemas.microsoft.com/office/drawing/2014/main" val="20000"/>
+                    </a:ext>
+                  </a:extLst>
+                </a:gridCol>
+                <a:gridCol w="1737360">
+                  <a:extLst>
+                    <a:ext uri="{9D8B030D-6E8A-4147-A177-3AD203B41FA5}">
+                      <a16:colId xmlns:a16="http://schemas.microsoft.com/office/drawing/2014/main" val="20001"/>
+                    </a:ext>
+                  </a:extLst>
+                </a:gridCol>
+                <a:gridCol w="3657600">
+                  <a:extLst>
+                    <a:ext uri="{9D8B030D-6E8A-4147-A177-3AD203B41FA5}">
+                      <a16:colId xmlns:a16="http://schemas.microsoft.com/office/drawing/2014/main" val="20002"/>
+                    </a:ext>
+                  </a:extLst>
+                </a:gridCol>
               </a:tblGrid>
               <a:tr h="384048">
                 <a:tc>
@@ -8696,7 +8496,7 @@
                       </a:r>
                     </a:p>
                   </a:txBody>
-                  <a:tcPr anchor="ctr" marL="91440" marR="91440" marT="36576" marB="36576">
+                  <a:tcPr marT="36576" marB="36576" anchor="ctr">
                     <a:lnL w="9525" cap="flat" cmpd="sng" algn="ctr">
                       <a:solidFill>
                         <a:srgbClr val="7F7F7F"/>
@@ -8743,7 +8543,7 @@
                       </a:r>
                     </a:p>
                   </a:txBody>
-                  <a:tcPr anchor="ctr" marL="91440" marR="91440" marT="36576" marB="36576">
+                  <a:tcPr marT="36576" marB="36576" anchor="ctr">
                     <a:lnL w="9525" cap="flat" cmpd="sng" algn="ctr">
                       <a:solidFill>
                         <a:srgbClr val="7F7F7F"/>
@@ -8790,7 +8590,7 @@
                       </a:r>
                     </a:p>
                   </a:txBody>
-                  <a:tcPr anchor="ctr" marL="91440" marR="91440" marT="36576" marB="36576">
+                  <a:tcPr marT="36576" marB="36576" anchor="ctr">
                     <a:lnL w="9525" cap="flat" cmpd="sng" algn="ctr">
                       <a:solidFill>
                         <a:srgbClr val="7F7F7F"/>
@@ -8820,6 +8620,11 @@
                     </a:solidFill>
                   </a:tcPr>
                 </a:tc>
+                <a:extLst>
+                  <a:ext uri="{0D108BD9-81ED-4DB2-BD59-A6C34878D82A}">
+                    <a16:rowId xmlns:a16="http://schemas.microsoft.com/office/drawing/2014/main" val="10000"/>
+                  </a:ext>
+                </a:extLst>
               </a:tr>
               <a:tr h="402336">
                 <a:tc>
@@ -8839,7 +8644,7 @@
                       </a:r>
                     </a:p>
                   </a:txBody>
-                  <a:tcPr anchor="ctr" marL="91440" marR="91440" marT="36576" marB="36576">
+                  <a:tcPr marT="36576" marB="36576" anchor="ctr">
                     <a:lnL w="9525" cap="flat" cmpd="sng" algn="ctr">
                       <a:solidFill>
                         <a:srgbClr val="7F7F7F"/>
@@ -8886,7 +8691,7 @@
                       </a:r>
                     </a:p>
                   </a:txBody>
-                  <a:tcPr anchor="ctr" marL="91440" marR="91440" marT="36576" marB="36576">
+                  <a:tcPr marT="36576" marB="36576" anchor="ctr">
                     <a:lnL w="9525" cap="flat" cmpd="sng" algn="ctr">
                       <a:solidFill>
                         <a:srgbClr val="7F7F7F"/>
@@ -8933,7 +8738,7 @@
                       </a:r>
                     </a:p>
                   </a:txBody>
-                  <a:tcPr anchor="ctr" marL="91440" marR="91440" marT="36576" marB="36576">
+                  <a:tcPr marT="36576" marB="36576" anchor="ctr">
                     <a:lnL w="9525" cap="flat" cmpd="sng" algn="ctr">
                       <a:solidFill>
                         <a:srgbClr val="7F7F7F"/>
@@ -8963,6 +8768,11 @@
                     </a:solidFill>
                   </a:tcPr>
                 </a:tc>
+                <a:extLst>
+                  <a:ext uri="{0D108BD9-81ED-4DB2-BD59-A6C34878D82A}">
+                    <a16:rowId xmlns:a16="http://schemas.microsoft.com/office/drawing/2014/main" val="10001"/>
+                  </a:ext>
+                </a:extLst>
               </a:tr>
               <a:tr h="402336">
                 <a:tc>
@@ -8982,7 +8792,7 @@
                       </a:r>
                     </a:p>
                   </a:txBody>
-                  <a:tcPr anchor="ctr" marL="91440" marR="91440" marT="36576" marB="36576">
+                  <a:tcPr marT="36576" marB="36576" anchor="ctr">
                     <a:lnL w="9525" cap="flat" cmpd="sng" algn="ctr">
                       <a:solidFill>
                         <a:srgbClr val="7F7F7F"/>
@@ -9029,7 +8839,7 @@
                       </a:r>
                     </a:p>
                   </a:txBody>
-                  <a:tcPr anchor="ctr" marL="91440" marR="91440" marT="36576" marB="36576">
+                  <a:tcPr marT="36576" marB="36576" anchor="ctr">
                     <a:lnL w="9525" cap="flat" cmpd="sng" algn="ctr">
                       <a:solidFill>
                         <a:srgbClr val="7F7F7F"/>
@@ -9076,7 +8886,7 @@
                       </a:r>
                     </a:p>
                   </a:txBody>
-                  <a:tcPr anchor="ctr" marL="91440" marR="91440" marT="36576" marB="36576">
+                  <a:tcPr marT="36576" marB="36576" anchor="ctr">
                     <a:lnL w="9525" cap="flat" cmpd="sng" algn="ctr">
                       <a:solidFill>
                         <a:srgbClr val="7F7F7F"/>
@@ -9106,6 +8916,11 @@
                     </a:solidFill>
                   </a:tcPr>
                 </a:tc>
+                <a:extLst>
+                  <a:ext uri="{0D108BD9-81ED-4DB2-BD59-A6C34878D82A}">
+                    <a16:rowId xmlns:a16="http://schemas.microsoft.com/office/drawing/2014/main" val="10002"/>
+                  </a:ext>
+                </a:extLst>
               </a:tr>
               <a:tr h="402336">
                 <a:tc>
@@ -9125,7 +8940,7 @@
                       </a:r>
                     </a:p>
                   </a:txBody>
-                  <a:tcPr anchor="ctr" marL="91440" marR="91440" marT="36576" marB="36576">
+                  <a:tcPr marT="36576" marB="36576" anchor="ctr">
                     <a:lnL w="9525" cap="flat" cmpd="sng" algn="ctr">
                       <a:solidFill>
                         <a:srgbClr val="7F7F7F"/>
@@ -9172,7 +8987,7 @@
                       </a:r>
                     </a:p>
                   </a:txBody>
-                  <a:tcPr anchor="ctr" marL="91440" marR="91440" marT="36576" marB="36576">
+                  <a:tcPr marT="36576" marB="36576" anchor="ctr">
                     <a:lnL w="9525" cap="flat" cmpd="sng" algn="ctr">
                       <a:solidFill>
                         <a:srgbClr val="7F7F7F"/>
@@ -9219,7 +9034,7 @@
                       </a:r>
                     </a:p>
                   </a:txBody>
-                  <a:tcPr anchor="ctr" marL="91440" marR="91440" marT="36576" marB="36576">
+                  <a:tcPr marT="36576" marB="36576" anchor="ctr">
                     <a:lnL w="9525" cap="flat" cmpd="sng" algn="ctr">
                       <a:solidFill>
                         <a:srgbClr val="7F7F7F"/>
@@ -9249,6 +9064,11 @@
                     </a:solidFill>
                   </a:tcPr>
                 </a:tc>
+                <a:extLst>
+                  <a:ext uri="{0D108BD9-81ED-4DB2-BD59-A6C34878D82A}">
+                    <a16:rowId xmlns:a16="http://schemas.microsoft.com/office/drawing/2014/main" val="10003"/>
+                  </a:ext>
+                </a:extLst>
               </a:tr>
               <a:tr h="402336">
                 <a:tc>
@@ -9268,7 +9088,7 @@
                       </a:r>
                     </a:p>
                   </a:txBody>
-                  <a:tcPr anchor="ctr" marL="91440" marR="91440" marT="36576" marB="36576">
+                  <a:tcPr marT="36576" marB="36576" anchor="ctr">
                     <a:lnL w="9525" cap="flat" cmpd="sng" algn="ctr">
                       <a:solidFill>
                         <a:srgbClr val="7F7F7F"/>
@@ -9315,7 +9135,7 @@
                       </a:r>
                     </a:p>
                   </a:txBody>
-                  <a:tcPr anchor="ctr" marL="91440" marR="91440" marT="36576" marB="36576">
+                  <a:tcPr marT="36576" marB="36576" anchor="ctr">
                     <a:lnL w="9525" cap="flat" cmpd="sng" algn="ctr">
                       <a:solidFill>
                         <a:srgbClr val="7F7F7F"/>
@@ -9362,7 +9182,7 @@
                       </a:r>
                     </a:p>
                   </a:txBody>
-                  <a:tcPr anchor="ctr" marL="91440" marR="91440" marT="36576" marB="36576">
+                  <a:tcPr marT="36576" marB="36576" anchor="ctr">
                     <a:lnL w="9525" cap="flat" cmpd="sng" algn="ctr">
                       <a:solidFill>
                         <a:srgbClr val="7F7F7F"/>
@@ -9392,6 +9212,11 @@
                     </a:solidFill>
                   </a:tcPr>
                 </a:tc>
+                <a:extLst>
+                  <a:ext uri="{0D108BD9-81ED-4DB2-BD59-A6C34878D82A}">
+                    <a16:rowId xmlns:a16="http://schemas.microsoft.com/office/drawing/2014/main" val="10004"/>
+                  </a:ext>
+                </a:extLst>
               </a:tr>
               <a:tr h="402336">
                 <a:tc>
@@ -9411,7 +9236,7 @@
                       </a:r>
                     </a:p>
                   </a:txBody>
-                  <a:tcPr anchor="ctr" marL="91440" marR="91440" marT="36576" marB="36576">
+                  <a:tcPr marT="36576" marB="36576" anchor="ctr">
                     <a:lnL w="9525" cap="flat" cmpd="sng" algn="ctr">
                       <a:solidFill>
                         <a:srgbClr val="7F7F7F"/>
@@ -9458,7 +9283,7 @@
                       </a:r>
                     </a:p>
                   </a:txBody>
-                  <a:tcPr anchor="ctr" marL="91440" marR="91440" marT="36576" marB="36576">
+                  <a:tcPr marT="36576" marB="36576" anchor="ctr">
                     <a:lnL w="9525" cap="flat" cmpd="sng" algn="ctr">
                       <a:solidFill>
                         <a:srgbClr val="7F7F7F"/>
@@ -9505,7 +9330,7 @@
                       </a:r>
                     </a:p>
                   </a:txBody>
-                  <a:tcPr anchor="ctr" marL="91440" marR="91440" marT="36576" marB="36576">
+                  <a:tcPr marT="36576" marB="36576" anchor="ctr">
                     <a:lnL w="9525" cap="flat" cmpd="sng" algn="ctr">
                       <a:solidFill>
                         <a:srgbClr val="7F7F7F"/>
@@ -9535,6 +9360,11 @@
                     </a:solidFill>
                   </a:tcPr>
                 </a:tc>
+                <a:extLst>
+                  <a:ext uri="{0D108BD9-81ED-4DB2-BD59-A6C34878D82A}">
+                    <a16:rowId xmlns:a16="http://schemas.microsoft.com/office/drawing/2014/main" val="10005"/>
+                  </a:ext>
+                </a:extLst>
               </a:tr>
               <a:tr h="402336">
                 <a:tc>
@@ -9554,7 +9384,7 @@
                       </a:r>
                     </a:p>
                   </a:txBody>
-                  <a:tcPr anchor="ctr" marL="91440" marR="91440" marT="36576" marB="36576">
+                  <a:tcPr marT="36576" marB="36576" anchor="ctr">
                     <a:lnL w="9525" cap="flat" cmpd="sng" algn="ctr">
                       <a:solidFill>
                         <a:srgbClr val="7F7F7F"/>
@@ -9601,7 +9431,7 @@
                       </a:r>
                     </a:p>
                   </a:txBody>
-                  <a:tcPr anchor="ctr" marL="91440" marR="91440" marT="36576" marB="36576">
+                  <a:tcPr marT="36576" marB="36576" anchor="ctr">
                     <a:lnL w="9525" cap="flat" cmpd="sng" algn="ctr">
                       <a:solidFill>
                         <a:srgbClr val="7F7F7F"/>
@@ -9648,7 +9478,7 @@
                       </a:r>
                     </a:p>
                   </a:txBody>
-                  <a:tcPr anchor="ctr" marL="91440" marR="91440" marT="36576" marB="36576">
+                  <a:tcPr marT="36576" marB="36576" anchor="ctr">
                     <a:lnL w="9525" cap="flat" cmpd="sng" algn="ctr">
                       <a:solidFill>
                         <a:srgbClr val="7F7F7F"/>
@@ -9678,6 +9508,11 @@
                     </a:solidFill>
                   </a:tcPr>
                 </a:tc>
+                <a:extLst>
+                  <a:ext uri="{0D108BD9-81ED-4DB2-BD59-A6C34878D82A}">
+                    <a16:rowId xmlns:a16="http://schemas.microsoft.com/office/drawing/2014/main" val="10006"/>
+                  </a:ext>
+                </a:extLst>
               </a:tr>
             </a:tbl>
           </a:graphicData>
@@ -9700,7 +9535,7 @@
           <a:noFill/>
         </p:spPr>
         <p:txBody>
-          <a:bodyPr wrap="square" lIns="0" rIns="0" tIns="0" bIns="0">
+          <a:bodyPr wrap="square" lIns="0" tIns="0" rIns="0" bIns="0">
             <a:spAutoFit/>
           </a:bodyPr>
           <a:lstStyle/>
@@ -9734,7 +9569,7 @@
           <a:noFill/>
         </p:spPr>
         <p:txBody>
-          <a:bodyPr wrap="square" lIns="0" rIns="0" tIns="0" bIns="0">
+          <a:bodyPr wrap="square" lIns="0" tIns="0" rIns="0" bIns="0">
             <a:spAutoFit/>
           </a:bodyPr>
           <a:lstStyle/>
@@ -9759,8 +9594,8 @@
 </p:sld>
 </file>
 
-<file path=ppt/slides/slide35.xml><?xml version="1.0" encoding="utf-8"?>
-<p:sld xmlns:a="http://schemas.openxmlformats.org/drawingml/2006/main" xmlns:p="http://schemas.openxmlformats.org/presentationml/2006/main" xmlns:r="http://schemas.openxmlformats.org/officeDocument/2006/relationships">
+<file path=ppt/slides/slide33.xml><?xml version="1.0" encoding="utf-8"?>
+<p:sld xmlns:a="http://schemas.openxmlformats.org/drawingml/2006/main" xmlns:r="http://schemas.openxmlformats.org/officeDocument/2006/relationships" xmlns:p="http://schemas.openxmlformats.org/presentationml/2006/main">
   <p:cSld>
     <p:spTree>
       <p:nvGrpSpPr>
@@ -9768,7 +9603,14 @@
         <p:cNvGrpSpPr/>
         <p:nvPr/>
       </p:nvGrpSpPr>
-      <p:grpSpPr/>
+      <p:grpSpPr>
+        <a:xfrm>
+          <a:off x="0" y="0"/>
+          <a:ext cx="0" cy="0"/>
+          <a:chOff x="0" y="0"/>
+          <a:chExt cx="0" cy="0"/>
+        </a:xfrm>
+      </p:grpSpPr>
       <p:sp>
         <p:nvSpPr>
           <p:cNvPr id="2" name="Title 2"/>
@@ -9854,7 +9696,7 @@
           </a:p>
           <a:p>
             <a:r>
-              <a:rPr lang="en-US" dirty="0" b="1"/>
+              <a:rPr lang="en-US" b="1" dirty="0"/>
               <a:t>A strategic adversary picks the best way to spend those resources. Assume yours will.</a:t>
             </a:r>
           </a:p>
@@ -9877,7 +9719,7 @@
           <a:p>
             <a:fld id="{B6F15528-21DE-4FAA-801E-634DDDAF4B2B}" type="slidenum">
               <a:rPr lang="en-US"/>
-              <a:t>24</a:t>
+              <a:t>33</a:t>
             </a:fld>
             <a:endParaRPr lang="en-US" dirty="0">
               <a:solidFill>
@@ -9895,8 +9737,8 @@
 </p:sld>
 </file>
 
-<file path=ppt/slides/slide36.xml><?xml version="1.0" encoding="utf-8"?>
-<p:sld xmlns:a="http://schemas.openxmlformats.org/drawingml/2006/main" xmlns:p="http://schemas.openxmlformats.org/presentationml/2006/main" xmlns:r="http://schemas.openxmlformats.org/officeDocument/2006/relationships">
+<file path=ppt/slides/slide34.xml><?xml version="1.0" encoding="utf-8"?>
+<p:sld xmlns:a="http://schemas.openxmlformats.org/drawingml/2006/main" xmlns:r="http://schemas.openxmlformats.org/officeDocument/2006/relationships" xmlns:p="http://schemas.openxmlformats.org/presentationml/2006/main">
   <p:cSld>
     <p:spTree>
       <p:nvGrpSpPr>
@@ -9904,7 +9746,14 @@
         <p:cNvGrpSpPr/>
         <p:nvPr/>
       </p:nvGrpSpPr>
-      <p:grpSpPr/>
+      <p:grpSpPr>
+        <a:xfrm>
+          <a:off x="0" y="0"/>
+          <a:ext cx="0" cy="0"/>
+          <a:chOff x="0" y="0"/>
+          <a:chExt cx="0" cy="0"/>
+        </a:xfrm>
+      </p:grpSpPr>
       <p:sp>
         <p:nvSpPr>
           <p:cNvPr id="2" name="Title 2"/>
@@ -9944,7 +9793,7 @@
           <a:p>
             <a:fld id="{B6F15528-21DE-4FAA-801E-634DDDAF4B2B}" type="slidenum">
               <a:rPr lang="en-US"/>
-              <a:t>24</a:t>
+              <a:t>34</a:t>
             </a:fld>
             <a:endParaRPr lang="en-US" dirty="0">
               <a:solidFill>
@@ -9973,11 +9822,41 @@
                 <a:tableStyleId>{5940675A-B579-460E-94D1-54222C63F5DA}</a:tableStyleId>
               </a:tblPr>
               <a:tblGrid>
-                <a:gridCol w="2011680"/>
-                <a:gridCol w="1508760"/>
-                <a:gridCol w="1508760"/>
-                <a:gridCol w="1508760"/>
-                <a:gridCol w="1508760"/>
+                <a:gridCol w="2011680">
+                  <a:extLst>
+                    <a:ext uri="{9D8B030D-6E8A-4147-A177-3AD203B41FA5}">
+                      <a16:colId xmlns:a16="http://schemas.microsoft.com/office/drawing/2014/main" val="20000"/>
+                    </a:ext>
+                  </a:extLst>
+                </a:gridCol>
+                <a:gridCol w="1508760">
+                  <a:extLst>
+                    <a:ext uri="{9D8B030D-6E8A-4147-A177-3AD203B41FA5}">
+                      <a16:colId xmlns:a16="http://schemas.microsoft.com/office/drawing/2014/main" val="20001"/>
+                    </a:ext>
+                  </a:extLst>
+                </a:gridCol>
+                <a:gridCol w="1508760">
+                  <a:extLst>
+                    <a:ext uri="{9D8B030D-6E8A-4147-A177-3AD203B41FA5}">
+                      <a16:colId xmlns:a16="http://schemas.microsoft.com/office/drawing/2014/main" val="20002"/>
+                    </a:ext>
+                  </a:extLst>
+                </a:gridCol>
+                <a:gridCol w="1508760">
+                  <a:extLst>
+                    <a:ext uri="{9D8B030D-6E8A-4147-A177-3AD203B41FA5}">
+                      <a16:colId xmlns:a16="http://schemas.microsoft.com/office/drawing/2014/main" val="20003"/>
+                    </a:ext>
+                  </a:extLst>
+                </a:gridCol>
+                <a:gridCol w="1508760">
+                  <a:extLst>
+                    <a:ext uri="{9D8B030D-6E8A-4147-A177-3AD203B41FA5}">
+                      <a16:colId xmlns:a16="http://schemas.microsoft.com/office/drawing/2014/main" val="20004"/>
+                    </a:ext>
+                  </a:extLst>
+                </a:gridCol>
               </a:tblGrid>
               <a:tr h="384048">
                 <a:tc>
@@ -9997,7 +9876,7 @@
                       </a:r>
                     </a:p>
                   </a:txBody>
-                  <a:tcPr anchor="ctr" marL="91440" marR="91440" marT="36576" marB="36576">
+                  <a:tcPr marT="36576" marB="36576" anchor="ctr">
                     <a:lnL w="9525" cap="flat" cmpd="sng" algn="ctr">
                       <a:solidFill>
                         <a:srgbClr val="7F7F7F"/>
@@ -10044,7 +9923,7 @@
                       </a:r>
                     </a:p>
                   </a:txBody>
-                  <a:tcPr anchor="ctr" marL="91440" marR="91440" marT="36576" marB="36576">
+                  <a:tcPr marT="36576" marB="36576" anchor="ctr">
                     <a:lnL w="9525" cap="flat" cmpd="sng" algn="ctr">
                       <a:solidFill>
                         <a:srgbClr val="7F7F7F"/>
@@ -10091,7 +9970,7 @@
                       </a:r>
                     </a:p>
                   </a:txBody>
-                  <a:tcPr anchor="ctr" marL="91440" marR="91440" marT="36576" marB="36576">
+                  <a:tcPr marT="36576" marB="36576" anchor="ctr">
                     <a:lnL w="9525" cap="flat" cmpd="sng" algn="ctr">
                       <a:solidFill>
                         <a:srgbClr val="7F7F7F"/>
@@ -10138,7 +10017,7 @@
                       </a:r>
                     </a:p>
                   </a:txBody>
-                  <a:tcPr anchor="ctr" marL="91440" marR="91440" marT="36576" marB="36576">
+                  <a:tcPr marT="36576" marB="36576" anchor="ctr">
                     <a:lnL w="9525" cap="flat" cmpd="sng" algn="ctr">
                       <a:solidFill>
                         <a:srgbClr val="7F7F7F"/>
@@ -10185,7 +10064,7 @@
                       </a:r>
                     </a:p>
                   </a:txBody>
-                  <a:tcPr anchor="ctr" marL="91440" marR="91440" marT="36576" marB="36576">
+                  <a:tcPr marT="36576" marB="36576" anchor="ctr">
                     <a:lnL w="9525" cap="flat" cmpd="sng" algn="ctr">
                       <a:solidFill>
                         <a:srgbClr val="7F7F7F"/>
@@ -10215,6 +10094,11 @@
                     </a:solidFill>
                   </a:tcPr>
                 </a:tc>
+                <a:extLst>
+                  <a:ext uri="{0D108BD9-81ED-4DB2-BD59-A6C34878D82A}">
+                    <a16:rowId xmlns:a16="http://schemas.microsoft.com/office/drawing/2014/main" val="10000"/>
+                  </a:ext>
+                </a:extLst>
               </a:tr>
               <a:tr h="566928">
                 <a:tc>
@@ -10234,7 +10118,7 @@
                       </a:r>
                     </a:p>
                   </a:txBody>
-                  <a:tcPr anchor="ctr" marL="91440" marR="91440" marT="36576" marB="36576">
+                  <a:tcPr marT="36576" marB="36576" anchor="ctr">
                     <a:lnL w="9525" cap="flat" cmpd="sng" algn="ctr">
                       <a:solidFill>
                         <a:srgbClr val="7F7F7F"/>
@@ -10270,18 +10154,10 @@
                     <a:lstStyle/>
                     <a:p>
                       <a:pPr algn="l"/>
-                      <a:r>
-                        <a:rPr sz="1500" b="0">
-                          <a:solidFill>
-                            <a:srgbClr val="000000"/>
-                          </a:solidFill>
-                          <a:latin typeface="Arial"/>
-                        </a:rPr>
-                        <a:t/>
-                      </a:r>
+                      <a:endParaRPr/>
                     </a:p>
                   </a:txBody>
-                  <a:tcPr anchor="ctr" marL="91440" marR="91440" marT="36576" marB="36576">
+                  <a:tcPr marT="36576" marB="36576" anchor="ctr">
                     <a:lnL w="9525" cap="flat" cmpd="sng" algn="ctr">
                       <a:solidFill>
                         <a:srgbClr val="7F7F7F"/>
@@ -10317,18 +10193,10 @@
                     <a:lstStyle/>
                     <a:p>
                       <a:pPr algn="l"/>
-                      <a:r>
-                        <a:rPr sz="1500" b="0">
-                          <a:solidFill>
-                            <a:srgbClr val="000000"/>
-                          </a:solidFill>
-                          <a:latin typeface="Arial"/>
-                        </a:rPr>
-                        <a:t/>
-                      </a:r>
+                      <a:endParaRPr/>
                     </a:p>
                   </a:txBody>
-                  <a:tcPr anchor="ctr" marL="91440" marR="91440" marT="36576" marB="36576">
+                  <a:tcPr marT="36576" marB="36576" anchor="ctr">
                     <a:lnL w="9525" cap="flat" cmpd="sng" algn="ctr">
                       <a:solidFill>
                         <a:srgbClr val="7F7F7F"/>
@@ -10375,7 +10243,7 @@
                       </a:r>
                     </a:p>
                   </a:txBody>
-                  <a:tcPr anchor="ctr" marL="91440" marR="91440" marT="36576" marB="36576">
+                  <a:tcPr marT="36576" marB="36576" anchor="ctr">
                     <a:lnL w="9525" cap="flat" cmpd="sng" algn="ctr">
                       <a:solidFill>
                         <a:srgbClr val="7F7F7F"/>
@@ -10411,18 +10279,10 @@
                     <a:lstStyle/>
                     <a:p>
                       <a:pPr algn="l"/>
-                      <a:r>
-                        <a:rPr sz="1500" b="0">
-                          <a:solidFill>
-                            <a:srgbClr val="000000"/>
-                          </a:solidFill>
-                          <a:latin typeface="Arial"/>
-                        </a:rPr>
-                        <a:t/>
-                      </a:r>
+                      <a:endParaRPr/>
                     </a:p>
                   </a:txBody>
-                  <a:tcPr anchor="ctr" marL="91440" marR="91440" marT="36576" marB="36576">
+                  <a:tcPr marT="36576" marB="36576" anchor="ctr">
                     <a:lnL w="9525" cap="flat" cmpd="sng" algn="ctr">
                       <a:solidFill>
                         <a:srgbClr val="7F7F7F"/>
@@ -10452,6 +10312,11 @@
                     </a:solidFill>
                   </a:tcPr>
                 </a:tc>
+                <a:extLst>
+                  <a:ext uri="{0D108BD9-81ED-4DB2-BD59-A6C34878D82A}">
+                    <a16:rowId xmlns:a16="http://schemas.microsoft.com/office/drawing/2014/main" val="10001"/>
+                  </a:ext>
+                </a:extLst>
               </a:tr>
               <a:tr h="566928">
                 <a:tc>
@@ -10471,7 +10336,7 @@
                       </a:r>
                     </a:p>
                   </a:txBody>
-                  <a:tcPr anchor="ctr" marL="91440" marR="91440" marT="36576" marB="36576">
+                  <a:tcPr marT="36576" marB="36576" anchor="ctr">
                     <a:lnL w="9525" cap="flat" cmpd="sng" algn="ctr">
                       <a:solidFill>
                         <a:srgbClr val="7F7F7F"/>
@@ -10507,18 +10372,10 @@
                     <a:lstStyle/>
                     <a:p>
                       <a:pPr algn="l"/>
-                      <a:r>
-                        <a:rPr sz="1500" b="0">
-                          <a:solidFill>
-                            <a:srgbClr val="000000"/>
-                          </a:solidFill>
-                          <a:latin typeface="Arial"/>
-                        </a:rPr>
-                        <a:t/>
-                      </a:r>
+                      <a:endParaRPr/>
                     </a:p>
                   </a:txBody>
-                  <a:tcPr anchor="ctr" marL="91440" marR="91440" marT="36576" marB="36576">
+                  <a:tcPr marT="36576" marB="36576" anchor="ctr">
                     <a:lnL w="9525" cap="flat" cmpd="sng" algn="ctr">
                       <a:solidFill>
                         <a:srgbClr val="7F7F7F"/>
@@ -10565,7 +10422,7 @@
                       </a:r>
                     </a:p>
                   </a:txBody>
-                  <a:tcPr anchor="ctr" marL="91440" marR="91440" marT="36576" marB="36576">
+                  <a:tcPr marT="36576" marB="36576" anchor="ctr">
                     <a:lnL w="9525" cap="flat" cmpd="sng" algn="ctr">
                       <a:solidFill>
                         <a:srgbClr val="7F7F7F"/>
@@ -10601,18 +10458,10 @@
                     <a:lstStyle/>
                     <a:p>
                       <a:pPr algn="l"/>
-                      <a:r>
-                        <a:rPr sz="1500" b="0">
-                          <a:solidFill>
-                            <a:srgbClr val="000000"/>
-                          </a:solidFill>
-                          <a:latin typeface="Arial"/>
-                        </a:rPr>
-                        <a:t/>
-                      </a:r>
+                      <a:endParaRPr/>
                     </a:p>
                   </a:txBody>
-                  <a:tcPr anchor="ctr" marL="91440" marR="91440" marT="36576" marB="36576">
+                  <a:tcPr marT="36576" marB="36576" anchor="ctr">
                     <a:lnL w="9525" cap="flat" cmpd="sng" algn="ctr">
                       <a:solidFill>
                         <a:srgbClr val="7F7F7F"/>
@@ -10648,18 +10497,10 @@
                     <a:lstStyle/>
                     <a:p>
                       <a:pPr algn="l"/>
-                      <a:r>
-                        <a:rPr sz="1500" b="0">
-                          <a:solidFill>
-                            <a:srgbClr val="000000"/>
-                          </a:solidFill>
-                          <a:latin typeface="Arial"/>
-                        </a:rPr>
-                        <a:t/>
-                      </a:r>
+                      <a:endParaRPr/>
                     </a:p>
                   </a:txBody>
-                  <a:tcPr anchor="ctr" marL="91440" marR="91440" marT="36576" marB="36576">
+                  <a:tcPr marT="36576" marB="36576" anchor="ctr">
                     <a:lnL w="9525" cap="flat" cmpd="sng" algn="ctr">
                       <a:solidFill>
                         <a:srgbClr val="7F7F7F"/>
@@ -10689,6 +10530,11 @@
                     </a:solidFill>
                   </a:tcPr>
                 </a:tc>
+                <a:extLst>
+                  <a:ext uri="{0D108BD9-81ED-4DB2-BD59-A6C34878D82A}">
+                    <a16:rowId xmlns:a16="http://schemas.microsoft.com/office/drawing/2014/main" val="10002"/>
+                  </a:ext>
+                </a:extLst>
               </a:tr>
               <a:tr h="566928">
                 <a:tc>
@@ -10708,7 +10554,7 @@
                       </a:r>
                     </a:p>
                   </a:txBody>
-                  <a:tcPr anchor="ctr" marL="91440" marR="91440" marT="36576" marB="36576">
+                  <a:tcPr marT="36576" marB="36576" anchor="ctr">
                     <a:lnL w="9525" cap="flat" cmpd="sng" algn="ctr">
                       <a:solidFill>
                         <a:srgbClr val="7F7F7F"/>
@@ -10755,7 +10601,7 @@
                       </a:r>
                     </a:p>
                   </a:txBody>
-                  <a:tcPr anchor="ctr" marL="91440" marR="91440" marT="36576" marB="36576">
+                  <a:tcPr marT="36576" marB="36576" anchor="ctr">
                     <a:lnL w="9525" cap="flat" cmpd="sng" algn="ctr">
                       <a:solidFill>
                         <a:srgbClr val="7F7F7F"/>
@@ -10791,18 +10637,10 @@
                     <a:lstStyle/>
                     <a:p>
                       <a:pPr algn="l"/>
-                      <a:r>
-                        <a:rPr sz="1500" b="0">
-                          <a:solidFill>
-                            <a:srgbClr val="000000"/>
-                          </a:solidFill>
-                          <a:latin typeface="Arial"/>
-                        </a:rPr>
-                        <a:t/>
-                      </a:r>
+                      <a:endParaRPr/>
                     </a:p>
                   </a:txBody>
-                  <a:tcPr anchor="ctr" marL="91440" marR="91440" marT="36576" marB="36576">
+                  <a:tcPr marT="36576" marB="36576" anchor="ctr">
                     <a:lnL w="9525" cap="flat" cmpd="sng" algn="ctr">
                       <a:solidFill>
                         <a:srgbClr val="7F7F7F"/>
@@ -10849,7 +10687,7 @@
                       </a:r>
                     </a:p>
                   </a:txBody>
-                  <a:tcPr anchor="ctr" marL="91440" marR="91440" marT="36576" marB="36576">
+                  <a:tcPr marT="36576" marB="36576" anchor="ctr">
                     <a:lnL w="9525" cap="flat" cmpd="sng" algn="ctr">
                       <a:solidFill>
                         <a:srgbClr val="7F7F7F"/>
@@ -10885,18 +10723,10 @@
                     <a:lstStyle/>
                     <a:p>
                       <a:pPr algn="l"/>
-                      <a:r>
-                        <a:rPr sz="1500" b="0">
-                          <a:solidFill>
-                            <a:srgbClr val="000000"/>
-                          </a:solidFill>
-                          <a:latin typeface="Arial"/>
-                        </a:rPr>
-                        <a:t/>
-                      </a:r>
+                      <a:endParaRPr/>
                     </a:p>
                   </a:txBody>
-                  <a:tcPr anchor="ctr" marL="91440" marR="91440" marT="36576" marB="36576">
+                  <a:tcPr marT="36576" marB="36576" anchor="ctr">
                     <a:lnL w="9525" cap="flat" cmpd="sng" algn="ctr">
                       <a:solidFill>
                         <a:srgbClr val="7F7F7F"/>
@@ -10926,6 +10756,11 @@
                     </a:solidFill>
                   </a:tcPr>
                 </a:tc>
+                <a:extLst>
+                  <a:ext uri="{0D108BD9-81ED-4DB2-BD59-A6C34878D82A}">
+                    <a16:rowId xmlns:a16="http://schemas.microsoft.com/office/drawing/2014/main" val="10003"/>
+                  </a:ext>
+                </a:extLst>
               </a:tr>
               <a:tr h="566928">
                 <a:tc>
@@ -10945,7 +10780,7 @@
                       </a:r>
                     </a:p>
                   </a:txBody>
-                  <a:tcPr anchor="ctr" marL="91440" marR="91440" marT="36576" marB="36576">
+                  <a:tcPr marT="36576" marB="36576" anchor="ctr">
                     <a:lnL w="9525" cap="flat" cmpd="sng" algn="ctr">
                       <a:solidFill>
                         <a:srgbClr val="7F7F7F"/>
@@ -10992,7 +10827,7 @@
                       </a:r>
                     </a:p>
                   </a:txBody>
-                  <a:tcPr anchor="ctr" marL="91440" marR="91440" marT="36576" marB="36576">
+                  <a:tcPr marT="36576" marB="36576" anchor="ctr">
                     <a:lnL w="9525" cap="flat" cmpd="sng" algn="ctr">
                       <a:solidFill>
                         <a:srgbClr val="7F7F7F"/>
@@ -11028,18 +10863,10 @@
                     <a:lstStyle/>
                     <a:p>
                       <a:pPr algn="l"/>
-                      <a:r>
-                        <a:rPr sz="1500" b="0">
-                          <a:solidFill>
-                            <a:srgbClr val="000000"/>
-                          </a:solidFill>
-                          <a:latin typeface="Arial"/>
-                        </a:rPr>
-                        <a:t/>
-                      </a:r>
+                      <a:endParaRPr/>
                     </a:p>
                   </a:txBody>
-                  <a:tcPr anchor="ctr" marL="91440" marR="91440" marT="36576" marB="36576">
+                  <a:tcPr marT="36576" marB="36576" anchor="ctr">
                     <a:lnL w="9525" cap="flat" cmpd="sng" algn="ctr">
                       <a:solidFill>
                         <a:srgbClr val="7F7F7F"/>
@@ -11075,18 +10902,10 @@
                     <a:lstStyle/>
                     <a:p>
                       <a:pPr algn="l"/>
-                      <a:r>
-                        <a:rPr sz="1500" b="0">
-                          <a:solidFill>
-                            <a:srgbClr val="000000"/>
-                          </a:solidFill>
-                          <a:latin typeface="Arial"/>
-                        </a:rPr>
-                        <a:t/>
-                      </a:r>
+                      <a:endParaRPr/>
                     </a:p>
                   </a:txBody>
-                  <a:tcPr anchor="ctr" marL="91440" marR="91440" marT="36576" marB="36576">
+                  <a:tcPr marT="36576" marB="36576" anchor="ctr">
                     <a:lnL w="9525" cap="flat" cmpd="sng" algn="ctr">
                       <a:solidFill>
                         <a:srgbClr val="7F7F7F"/>
@@ -11122,18 +10941,10 @@
                     <a:lstStyle/>
                     <a:p>
                       <a:pPr algn="l"/>
-                      <a:r>
-                        <a:rPr sz="1500" b="0">
-                          <a:solidFill>
-                            <a:srgbClr val="000000"/>
-                          </a:solidFill>
-                          <a:latin typeface="Arial"/>
-                        </a:rPr>
-                        <a:t/>
-                      </a:r>
+                      <a:endParaRPr/>
                     </a:p>
                   </a:txBody>
-                  <a:tcPr anchor="ctr" marL="91440" marR="91440" marT="36576" marB="36576">
+                  <a:tcPr marT="36576" marB="36576" anchor="ctr">
                     <a:lnL w="9525" cap="flat" cmpd="sng" algn="ctr">
                       <a:solidFill>
                         <a:srgbClr val="7F7F7F"/>
@@ -11163,6 +10974,11 @@
                     </a:solidFill>
                   </a:tcPr>
                 </a:tc>
+                <a:extLst>
+                  <a:ext uri="{0D108BD9-81ED-4DB2-BD59-A6C34878D82A}">
+                    <a16:rowId xmlns:a16="http://schemas.microsoft.com/office/drawing/2014/main" val="10004"/>
+                  </a:ext>
+                </a:extLst>
               </a:tr>
             </a:tbl>
           </a:graphicData>
@@ -11185,7 +11001,7 @@
           <a:noFill/>
         </p:spPr>
         <p:txBody>
-          <a:bodyPr wrap="square" lIns="0" rIns="0" tIns="0" bIns="0">
+          <a:bodyPr wrap="square" lIns="0" tIns="0" rIns="0" bIns="0">
             <a:spAutoFit/>
           </a:bodyPr>
           <a:lstStyle/>
@@ -11219,7 +11035,7 @@
           <a:noFill/>
         </p:spPr>
         <p:txBody>
-          <a:bodyPr wrap="square" lIns="0" rIns="0" tIns="0" bIns="0">
+          <a:bodyPr wrap="square" lIns="0" tIns="0" rIns="0" bIns="0">
             <a:spAutoFit/>
           </a:bodyPr>
           <a:lstStyle/>
@@ -11233,6 +11049,272 @@
               </a:rPr>
               <a:t>After David Aucsmith, Microsoft</a:t>
             </a:r>
+          </a:p>
+        </p:txBody>
+      </p:sp>
+    </p:spTree>
+  </p:cSld>
+  <p:clrMapOvr>
+    <a:masterClrMapping/>
+  </p:clrMapOvr>
+</p:sld>
+</file>
+
+<file path=ppt/slides/slide35.xml><?xml version="1.0" encoding="utf-8"?>
+<p:sld xmlns:a="http://schemas.openxmlformats.org/drawingml/2006/main" xmlns:r="http://schemas.openxmlformats.org/officeDocument/2006/relationships" xmlns:p="http://schemas.openxmlformats.org/presentationml/2006/main">
+  <p:cSld name="Slide 33">
+    <p:spTree>
+      <p:nvGrpSpPr>
+        <p:cNvPr id="1" name=""/>
+        <p:cNvGrpSpPr/>
+        <p:nvPr/>
+      </p:nvGrpSpPr>
+      <p:grpSpPr>
+        <a:xfrm>
+          <a:off x="0" y="0"/>
+          <a:ext cx="0" cy="0"/>
+          <a:chOff x="0" y="0"/>
+          <a:chExt cx="0" cy="0"/>
+        </a:xfrm>
+      </p:grpSpPr>
+      <p:sp>
+        <p:nvSpPr>
+          <p:cNvPr id="2" name="Title 2"/>
+          <p:cNvSpPr>
+            <a:spLocks noGrp="1"/>
+          </p:cNvSpPr>
+          <p:nvPr>
+            <p:ph type="title"/>
+          </p:nvPr>
+        </p:nvSpPr>
+        <p:spPr/>
+        <p:txBody>
+          <a:bodyPr/>
+          <a:lstStyle/>
+          <a:p>
+            <a:r>
+              <a:rPr lang="en-US" dirty="0"/>
+              <a:t>Threat models</a:t>
+            </a:r>
+          </a:p>
+        </p:txBody>
+      </p:sp>
+      <p:sp>
+        <p:nvSpPr>
+          <p:cNvPr id="3" name="Content 3"/>
+          <p:cNvSpPr>
+            <a:spLocks noGrp="1"/>
+          </p:cNvSpPr>
+          <p:nvPr>
+            <p:ph idx="1"/>
+          </p:nvPr>
+        </p:nvSpPr>
+        <p:spPr/>
+        <p:txBody>
+          <a:bodyPr/>
+          <a:lstStyle/>
+          <a:p>
+            <a:r>
+              <a:rPr lang="en-US" dirty="0"/>
+              <a:t>Before you can defend anything, write down</a:t>
+            </a:r>
+          </a:p>
+          <a:p>
+            <a:pPr lvl="1"/>
+            <a:r>
+              <a:rPr lang="en-US" dirty="0"/>
+              <a:t>Who the attacker is, what they can do, and what they want</a:t>
+            </a:r>
+            <a:endParaRPr lang="en-US" sz="2000" dirty="0"/>
+          </a:p>
+          <a:p>
+            <a:pPr lvl="1"/>
+            <a:r>
+              <a:rPr lang="en-US" dirty="0"/>
+              <a:t>What defenses are already in place</a:t>
+            </a:r>
+            <a:endParaRPr lang="en-US" sz="2000" dirty="0"/>
+          </a:p>
+          <a:p>
+            <a:r>
+              <a:rPr lang="en-US" dirty="0"/>
+              <a:t>A useful ladder of terms</a:t>
+            </a:r>
+          </a:p>
+          <a:p>
+            <a:pPr lvl="1"/>
+            <a:r>
+              <a:rPr lang="en-US" sz="2000" b="1" dirty="0"/>
+              <a:t>Weakness  &lt;  Vulnerability  &lt;  Exploit  &lt;  Attack</a:t>
+            </a:r>
+            <a:endParaRPr lang="en-US" sz="2000" dirty="0"/>
+          </a:p>
+          <a:p>
+            <a:r>
+              <a:rPr lang="en-US" b="1" dirty="0"/>
+              <a:t>Without a threat model, "is it secure?" has no answer at all.</a:t>
+            </a:r>
+            <a:endParaRPr lang="en-US" dirty="0"/>
+          </a:p>
+        </p:txBody>
+      </p:sp>
+      <p:sp>
+        <p:nvSpPr>
+          <p:cNvPr id="4" name="Slide Number 4"/>
+          <p:cNvSpPr>
+            <a:spLocks noGrp="1"/>
+          </p:cNvSpPr>
+          <p:nvPr>
+            <p:ph type="sldNum" sz="quarter" idx="4"/>
+          </p:nvPr>
+        </p:nvSpPr>
+        <p:spPr/>
+        <p:txBody>
+          <a:bodyPr/>
+          <a:lstStyle/>
+          <a:p>
+            <a:fld id="{B6F15528-21DE-4FAA-801E-634DDDAF4B2B}" type="slidenum">
+              <a:rPr lang="en-US"/>
+              <a:t>35</a:t>
+            </a:fld>
+            <a:endParaRPr lang="en-US" dirty="0">
+              <a:solidFill>
+                <a:srgbClr val="000000"/>
+              </a:solidFill>
+            </a:endParaRPr>
+          </a:p>
+        </p:txBody>
+      </p:sp>
+    </p:spTree>
+    <p:extLst>
+      <p:ext uri="{BB962C8B-B14F-4D97-AF65-F5344CB8AC3E}">
+        <p14:creationId xmlns:p14="http://schemas.microsoft.com/office/powerpoint/2010/main" val="2608079393"/>
+      </p:ext>
+    </p:extLst>
+  </p:cSld>
+  <p:clrMapOvr>
+    <a:masterClrMapping/>
+  </p:clrMapOvr>
+</p:sld>
+</file>
+
+<file path=ppt/slides/slide36.xml><?xml version="1.0" encoding="utf-8"?>
+<p:sld xmlns:a="http://schemas.openxmlformats.org/drawingml/2006/main" xmlns:r="http://schemas.openxmlformats.org/officeDocument/2006/relationships" xmlns:p="http://schemas.openxmlformats.org/presentationml/2006/main">
+  <p:cSld>
+    <p:spTree>
+      <p:nvGrpSpPr>
+        <p:cNvPr id="1" name=""/>
+        <p:cNvGrpSpPr/>
+        <p:nvPr/>
+      </p:nvGrpSpPr>
+      <p:grpSpPr>
+        <a:xfrm>
+          <a:off x="0" y="0"/>
+          <a:ext cx="0" cy="0"/>
+          <a:chOff x="0" y="0"/>
+          <a:chExt cx="0" cy="0"/>
+        </a:xfrm>
+      </p:grpSpPr>
+      <p:sp>
+        <p:nvSpPr>
+          <p:cNvPr id="2" name="Title 2"/>
+          <p:cNvSpPr>
+            <a:spLocks noGrp="1"/>
+          </p:cNvSpPr>
+          <p:nvPr>
+            <p:ph type="title"/>
+          </p:nvPr>
+        </p:nvSpPr>
+        <p:spPr/>
+        <p:txBody>
+          <a:bodyPr/>
+          <a:lstStyle/>
+          <a:p>
+            <a:r>
+              <a:rPr lang="en-US" dirty="0"/>
+              <a:t>So, is the system secure?</a:t>
+            </a:r>
+          </a:p>
+        </p:txBody>
+      </p:sp>
+      <p:sp>
+        <p:nvSpPr>
+          <p:cNvPr id="3" name="Content 3"/>
+          <p:cNvSpPr>
+            <a:spLocks noGrp="1"/>
+          </p:cNvSpPr>
+          <p:nvPr>
+            <p:ph idx="1"/>
+          </p:nvPr>
+        </p:nvSpPr>
+        <p:spPr/>
+        <p:txBody>
+          <a:bodyPr/>
+          <a:lstStyle/>
+          <a:p>
+            <a:r>
+              <a:rPr lang="en-US" dirty="0"/>
+              <a:t>Only relative to a threat model: secure means no adversary within it can violate the policy</a:t>
+            </a:r>
+          </a:p>
+          <a:p>
+            <a:r>
+              <a:rPr lang="en-US" dirty="0"/>
+              <a:t>Security mechanisms enforce the policy</a:t>
+            </a:r>
+          </a:p>
+          <a:p>
+            <a:pPr lvl="1"/>
+            <a:r>
+              <a:rPr lang="en-US" dirty="0"/>
+              <a:t>Software, hardware, cryptography, or people and procedures</a:t>
+            </a:r>
+          </a:p>
+          <a:p>
+            <a:pPr lvl="1"/>
+            <a:r>
+              <a:rPr lang="en-US" dirty="0"/>
+              <a:t>For example, no one employee may alter the log, so keep copies on machines no one employee can all reach</a:t>
+            </a:r>
+          </a:p>
+          <a:p>
+            <a:r>
+              <a:rPr lang="en-US" dirty="0"/>
+              <a:t>A security argument shows the mechanisms uphold the policy under the threat model’s assumptions</a:t>
+            </a:r>
+          </a:p>
+          <a:p>
+            <a:r>
+              <a:rPr lang="en-US" b="1" dirty="0"/>
+              <a:t>If the threat model is wrong, so is the argument.</a:t>
+            </a:r>
+          </a:p>
+        </p:txBody>
+      </p:sp>
+      <p:sp>
+        <p:nvSpPr>
+          <p:cNvPr id="4" name="Slide Number 4"/>
+          <p:cNvSpPr>
+            <a:spLocks noGrp="1"/>
+          </p:cNvSpPr>
+          <p:nvPr>
+            <p:ph type="sldNum" sz="quarter" idx="4"/>
+          </p:nvPr>
+        </p:nvSpPr>
+        <p:spPr/>
+        <p:txBody>
+          <a:bodyPr/>
+          <a:lstStyle/>
+          <a:p>
+            <a:fld id="{B6F15528-21DE-4FAA-801E-634DDDAF4B2B}" type="slidenum">
+              <a:rPr lang="en-US"/>
+              <a:t>36</a:t>
+            </a:fld>
+            <a:endParaRPr lang="en-US" dirty="0">
+              <a:solidFill>
+                <a:srgbClr val="000000"/>
+              </a:solidFill>
+            </a:endParaRPr>
           </a:p>
         </p:txBody>
       </p:sp>
@@ -11245,15 +11327,22 @@
 </file>
 
 <file path=ppt/slides/slide37.xml><?xml version="1.0" encoding="utf-8"?>
-<p:sld xmlns:a="http://schemas.openxmlformats.org/drawingml/2006/main" xmlns:p="http://schemas.openxmlformats.org/presentationml/2006/main" xmlns:r="http://schemas.openxmlformats.org/officeDocument/2006/relationships">
-  <p:cSld>
+<p:sld xmlns:a="http://schemas.openxmlformats.org/drawingml/2006/main" xmlns:r="http://schemas.openxmlformats.org/officeDocument/2006/relationships" xmlns:p="http://schemas.openxmlformats.org/presentationml/2006/main">
+  <p:cSld name="Slide 34">
     <p:spTree>
       <p:nvGrpSpPr>
         <p:cNvPr id="1" name=""/>
         <p:cNvGrpSpPr/>
         <p:nvPr/>
       </p:nvGrpSpPr>
-      <p:grpSpPr/>
+      <p:grpSpPr>
+        <a:xfrm>
+          <a:off x="0" y="0"/>
+          <a:ext cx="0" cy="0"/>
+          <a:chOff x="0" y="0"/>
+          <a:chExt cx="0" cy="0"/>
+        </a:xfrm>
+      </p:grpSpPr>
       <p:sp>
         <p:nvSpPr>
           <p:cNvPr id="2" name="Title 2"/>
@@ -11271,7 +11360,7 @@
           <a:p>
             <a:r>
               <a:rPr lang="en-US" dirty="0"/>
-              <a:t>So, is the system secure?</a:t>
+              <a:t>Before Wednesday</a:t>
             </a:r>
           </a:p>
         </p:txBody>
@@ -11293,40 +11382,18 @@
           <a:p>
             <a:r>
               <a:rPr lang="en-US" dirty="0"/>
-              <a:t>Only relative to a threat model: secure means no adversary within it can violate the policy</a:t>
-            </a:r>
-          </a:p>
-          <a:p>
-            <a:r>
-              <a:rPr lang="en-US" dirty="0"/>
-              <a:t>Security mechanisms enforce the policy</a:t>
-            </a:r>
-          </a:p>
-          <a:p>
-            <a:pPr lvl="1"/>
-            <a:r>
-              <a:rPr lang="en-US" dirty="0"/>
-              <a:t>Software, hardware, cryptography, or people and procedures</a:t>
-            </a:r>
-          </a:p>
-          <a:p>
-            <a:pPr lvl="1"/>
-            <a:r>
-              <a:rPr lang="en-US" dirty="0"/>
-              <a:t>For example, no one employee may alter the log, so keep copies on machines no one employee can all reach</a:t>
-            </a:r>
-          </a:p>
-          <a:p>
-            <a:r>
-              <a:rPr lang="en-US" dirty="0"/>
-              <a:t>A security argument shows the mechanisms uphold the policy under the threat model’s assumptions</a:t>
-            </a:r>
-          </a:p>
-          <a:p>
-            <a:r>
-              <a:rPr lang="en-US" dirty="0" b="1"/>
-              <a:t>If the threat model is wrong, so is the argument.</a:t>
-            </a:r>
+              <a:t>Read the syllabus, check the schedule, etc.</a:t>
+            </a:r>
+          </a:p>
+          <a:p>
+            <a:endParaRPr lang="en-US" sz="2000" dirty="0"/>
+          </a:p>
+          <a:p>
+            <a:r>
+              <a:rPr lang="en-US" sz="2600" b="1" dirty="0"/>
+              <a:t>Questions?</a:t>
+            </a:r>
+            <a:endParaRPr lang="en-US" dirty="0"/>
           </a:p>
         </p:txBody>
       </p:sp>
@@ -11347,7 +11414,7 @@
           <a:p>
             <a:fld id="{B6F15528-21DE-4FAA-801E-634DDDAF4B2B}" type="slidenum">
               <a:rPr lang="en-US"/>
-              <a:t>24</a:t>
+              <a:t>37</a:t>
             </a:fld>
             <a:endParaRPr lang="en-US" dirty="0">
               <a:solidFill>
@@ -11358,6 +11425,11 @@
         </p:txBody>
       </p:sp>
     </p:spTree>
+    <p:extLst>
+      <p:ext uri="{BB962C8B-B14F-4D97-AF65-F5344CB8AC3E}">
+        <p14:creationId xmlns:p14="http://schemas.microsoft.com/office/powerpoint/2010/main" val="1386048013"/>
+      </p:ext>
+    </p:extLst>
   </p:cSld>
   <p:clrMapOvr>
     <a:masterClrMapping/>
@@ -11518,9 +11590,10 @@
           <a:lstStyle/>
           <a:p>
             <a:r>
-              <a:rPr lang="en-US" dirty="0"/>
-              <a:t>One bug can take down a lot</a:t>
-            </a:r>
+              <a:rPr lang="en-US"/>
+              <a:t>Infamous bugs</a:t>
+            </a:r>
+            <a:endParaRPr lang="en-US" dirty="0"/>
           </a:p>
         </p:txBody>
       </p:sp>
@@ -11664,9 +11737,10 @@
           <a:lstStyle/>
           <a:p>
             <a:r>
-              <a:rPr lang="en-US" dirty="0"/>
-              <a:t>The reaction: contain the damage</a:t>
-            </a:r>
+              <a:rPr lang="en-US"/>
+              <a:t>Mitigations?</a:t>
+            </a:r>
+            <a:endParaRPr lang="en-US" dirty="0"/>
           </a:p>
         </p:txBody>
       </p:sp>
@@ -11794,9 +11868,18 @@
           <a:lstStyle/>
           <a:p>
             <a:r>
-              <a:rPr lang="en-US" dirty="0"/>
-              <a:t>The limitation: the software is still buggy</a:t>
-            </a:r>
+              <a:rPr lang="en-US"/>
+              <a:t>Software </a:t>
+            </a:r>
+            <a:r>
+              <a:rPr lang="en-US" dirty="0"/>
+              <a:t>is </a:t>
+            </a:r>
+            <a:r>
+              <a:rPr lang="en-US"/>
+              <a:t>still buggy…</a:t>
+            </a:r>
+            <a:endParaRPr lang="en-US" dirty="0"/>
           </a:p>
         </p:txBody>
       </p:sp>
@@ -11940,8 +12023,12 @@
           <a:lstStyle/>
           <a:p>
             <a:r>
-              <a:rPr lang="en-US" dirty="0"/>
-              <a:t>Exploitation: mixing code and data</a:t>
+              <a:rPr lang="en-US"/>
+              <a:t>Mixing </a:t>
+            </a:r>
+            <a:r>
+              <a:rPr lang="en-US" dirty="0"/>
+              <a:t>code and data</a:t>
             </a:r>
           </a:p>
         </p:txBody>
